--- a/军民融合/ppt/0B.pptx
+++ b/军民融合/ppt/0B.pptx
@@ -107,6 +107,11 @@
       </a:defRPr>
     </a:lvl9pPr>
   </p:defaultTextStyle>
+  <p:extLst>
+    <p:ext uri="{EFAFB233-063F-42B5-8137-9DF3F51BA10A}">
+      <p15:sldGuideLst xmlns:p15="http://schemas.microsoft.com/office/powerpoint/2012/main"/>
+    </p:ext>
+  </p:extLst>
 </p:presentation>
 </file>
 
@@ -8354,7 +8359,7 @@
           <a:p>
             <a:pPr algn="ctr"/>
             <a:r>
-              <a:rPr lang="zh-CN" altLang="en-US" sz="900" b="1" dirty="0">
+              <a:rPr lang="zh-CN" altLang="en-US" sz="900" b="1">
                 <a:solidFill>
                   <a:srgbClr val="2E54A1"/>
                 </a:solidFill>
@@ -8362,8 +8367,16 @@
                 <a:ea typeface="微软雅黑" panose="020B0503020204020204" pitchFamily="34" charset="-122"/>
                 <a:sym typeface="+mn-ea"/>
               </a:rPr>
-              <a:t>智能入职</a:t>
-            </a:r>
+              <a:t>智能认知</a:t>
+            </a:r>
+            <a:endParaRPr lang="zh-CN" altLang="en-US" sz="900" b="1" dirty="0">
+              <a:solidFill>
+                <a:srgbClr val="2E54A1"/>
+              </a:solidFill>
+              <a:latin typeface="微软雅黑" panose="020B0503020204020204" pitchFamily="34" charset="-122"/>
+              <a:ea typeface="微软雅黑" panose="020B0503020204020204" pitchFamily="34" charset="-122"/>
+              <a:sym typeface="+mn-ea"/>
+            </a:endParaRPr>
           </a:p>
         </p:txBody>
       </p:sp>

--- a/军民融合/ppt/0B.pptx
+++ b/军民融合/ppt/0B.pptx
@@ -489,7 +489,7 @@
           <a:p>
             <a:fld id="{EAD68A4E-1AD5-4525-8412-8CB756C9DD23}" type="datetimeFigureOut">
               <a:rPr lang="zh-CN" altLang="en-US"/>
-              <a:t>2026/6/17</a:t>
+              <a:t>2026/6/18</a:t>
             </a:fld>
             <a:endParaRPr/>
           </a:p>
@@ -656,7 +656,7 @@
           <a:p>
             <a:fld id="{EAD68A4E-1AD5-4525-8412-8CB756C9DD23}" type="datetimeFigureOut">
               <a:rPr lang="zh-CN" altLang="en-US"/>
-              <a:t>2026/6/17</a:t>
+              <a:t>2026/6/18</a:t>
             </a:fld>
             <a:endParaRPr/>
           </a:p>
@@ -833,7 +833,7 @@
           <a:p>
             <a:fld id="{EAD68A4E-1AD5-4525-8412-8CB756C9DD23}" type="datetimeFigureOut">
               <a:rPr lang="zh-CN" altLang="en-US"/>
-              <a:t>2026/6/17</a:t>
+              <a:t>2026/6/18</a:t>
             </a:fld>
             <a:endParaRPr/>
           </a:p>
@@ -1000,7 +1000,7 @@
           <a:p>
             <a:fld id="{EAD68A4E-1AD5-4525-8412-8CB756C9DD23}" type="datetimeFigureOut">
               <a:rPr lang="zh-CN" altLang="en-US"/>
-              <a:t>2026/6/17</a:t>
+              <a:t>2026/6/18</a:t>
             </a:fld>
             <a:endParaRPr/>
           </a:p>
@@ -1241,7 +1241,7 @@
           <a:p>
             <a:fld id="{EAD68A4E-1AD5-4525-8412-8CB756C9DD23}" type="datetimeFigureOut">
               <a:rPr lang="zh-CN" altLang="en-US"/>
-              <a:t>2026/6/17</a:t>
+              <a:t>2026/6/18</a:t>
             </a:fld>
             <a:endParaRPr/>
           </a:p>
@@ -1474,7 +1474,7 @@
           <a:p>
             <a:fld id="{EAD68A4E-1AD5-4525-8412-8CB756C9DD23}" type="datetimeFigureOut">
               <a:rPr lang="zh-CN" altLang="en-US"/>
-              <a:t>2026/6/17</a:t>
+              <a:t>2026/6/18</a:t>
             </a:fld>
             <a:endParaRPr/>
           </a:p>
@@ -1844,7 +1844,7 @@
           <a:p>
             <a:fld id="{EAD68A4E-1AD5-4525-8412-8CB756C9DD23}" type="datetimeFigureOut">
               <a:rPr lang="zh-CN" altLang="en-US"/>
-              <a:t>2026/6/17</a:t>
+              <a:t>2026/6/18</a:t>
             </a:fld>
             <a:endParaRPr/>
           </a:p>
@@ -1955,7 +1955,7 @@
           <a:p>
             <a:fld id="{EAD68A4E-1AD5-4525-8412-8CB756C9DD23}" type="datetimeFigureOut">
               <a:rPr lang="zh-CN" altLang="en-US"/>
-              <a:t>2026/6/17</a:t>
+              <a:t>2026/6/18</a:t>
             </a:fld>
             <a:endParaRPr/>
           </a:p>
@@ -2045,7 +2045,7 @@
           <a:p>
             <a:fld id="{EAD68A4E-1AD5-4525-8412-8CB756C9DD23}" type="datetimeFigureOut">
               <a:rPr lang="zh-CN" altLang="en-US"/>
-              <a:t>2026/6/17</a:t>
+              <a:t>2026/6/18</a:t>
             </a:fld>
             <a:endParaRPr/>
           </a:p>
@@ -2330,7 +2330,7 @@
           <a:p>
             <a:fld id="{EAD68A4E-1AD5-4525-8412-8CB756C9DD23}" type="datetimeFigureOut">
               <a:rPr lang="zh-CN" altLang="en-US"/>
-              <a:t>2026/6/17</a:t>
+              <a:t>2026/6/18</a:t>
             </a:fld>
             <a:endParaRPr/>
           </a:p>
@@ -2578,7 +2578,7 @@
           <a:p>
             <a:fld id="{EAD68A4E-1AD5-4525-8412-8CB756C9DD23}" type="datetimeFigureOut">
               <a:rPr lang="zh-CN" altLang="en-US"/>
-              <a:t>2026/6/17</a:t>
+              <a:t>2026/6/18</a:t>
             </a:fld>
             <a:endParaRPr/>
           </a:p>
@@ -2789,7 +2789,7 @@
           <a:p>
             <a:fld id="{EAD68A4E-1AD5-4525-8412-8CB756C9DD23}" type="datetimeFigureOut">
               <a:rPr lang="zh-CN" altLang="en-US"/>
-              <a:t>2026/6/17</a:t>
+              <a:t>2026/6/18</a:t>
             </a:fld>
             <a:endParaRPr/>
           </a:p>
@@ -3326,8 +3326,8 @@
         </p:nvSpPr>
         <p:spPr>
           <a:xfrm>
-            <a:off x="7908224" y="1050290"/>
-            <a:ext cx="2293732" cy="6101123"/>
+            <a:off x="7908224" y="1050291"/>
+            <a:ext cx="2293732" cy="6040122"/>
           </a:xfrm>
           <a:prstGeom prst="roundRect">
             <a:avLst>
@@ -3789,8 +3789,8 @@
         </p:nvSpPr>
         <p:spPr>
           <a:xfrm>
-            <a:off x="413948" y="2745016"/>
-            <a:ext cx="2255171" cy="584775"/>
+            <a:off x="692218" y="2889025"/>
+            <a:ext cx="2255171" cy="338554"/>
           </a:xfrm>
           <a:prstGeom prst="rect">
             <a:avLst/>
@@ -3813,29 +3813,7 @@
                 <a:ea typeface="微软雅黑" panose="020B0503020204020204" pitchFamily="34" charset="-122"/>
                 <a:sym typeface="+mn-ea"/>
               </a:rPr>
-              <a:t>提取</a:t>
-            </a:r>
-            <a:endParaRPr lang="en-US" altLang="zh-CN" sz="1600" b="1" dirty="0">
-              <a:solidFill>
-                <a:srgbClr val="C00000"/>
-              </a:solidFill>
-              <a:latin typeface="微软雅黑" panose="020B0503020204020204" pitchFamily="34" charset="-122"/>
-              <a:ea typeface="微软雅黑" panose="020B0503020204020204" pitchFamily="34" charset="-122"/>
-              <a:sym typeface="+mn-ea"/>
-            </a:endParaRPr>
-          </a:p>
-          <a:p>
-            <a:pPr algn="ctr"/>
-            <a:r>
-              <a:rPr lang="zh-CN" altLang="en-US" sz="1600" b="1" dirty="0">
-                <a:solidFill>
-                  <a:srgbClr val="C00000"/>
-                </a:solidFill>
-                <a:latin typeface="微软雅黑" panose="020B0503020204020204" pitchFamily="34" charset="-122"/>
-                <a:ea typeface="微软雅黑" panose="020B0503020204020204" pitchFamily="34" charset="-122"/>
-                <a:sym typeface="+mn-ea"/>
-              </a:rPr>
-              <a:t>怎么分辨、精确？</a:t>
+              <a:t>怎么精确提取？</a:t>
             </a:r>
           </a:p>
         </p:txBody>
@@ -3944,7 +3922,7 @@
         </p:nvSpPr>
         <p:spPr>
           <a:xfrm>
-            <a:off x="3011140" y="2759026"/>
+            <a:off x="3072688" y="2876557"/>
             <a:ext cx="2222333" cy="330799"/>
           </a:xfrm>
           <a:prstGeom prst="rect">
@@ -3968,29 +3946,7 @@
                 <a:ea typeface="微软雅黑" panose="020B0503020204020204" pitchFamily="34" charset="-122"/>
                 <a:sym typeface="+mn-ea"/>
               </a:rPr>
-              <a:t>存储</a:t>
-            </a:r>
-            <a:endParaRPr lang="en-US" altLang="zh-CN" sz="1600" b="1" dirty="0">
-              <a:solidFill>
-                <a:srgbClr val="C00000"/>
-              </a:solidFill>
-              <a:latin typeface="微软雅黑" panose="020B0503020204020204" pitchFamily="34" charset="-122"/>
-              <a:ea typeface="微软雅黑" panose="020B0503020204020204" pitchFamily="34" charset="-122"/>
-              <a:sym typeface="+mn-ea"/>
-            </a:endParaRPr>
-          </a:p>
-          <a:p>
-            <a:pPr algn="ctr"/>
-            <a:r>
-              <a:rPr lang="zh-CN" altLang="en-US" sz="1600" b="1" dirty="0">
-                <a:solidFill>
-                  <a:srgbClr val="C00000"/>
-                </a:solidFill>
-                <a:latin typeface="微软雅黑" panose="020B0503020204020204" pitchFamily="34" charset="-122"/>
-                <a:ea typeface="微软雅黑" panose="020B0503020204020204" pitchFamily="34" charset="-122"/>
-                <a:sym typeface="+mn-ea"/>
-              </a:rPr>
-              <a:t>怎么轻量、可信？</a:t>
+              <a:t>怎么轻量存储？</a:t>
             </a:r>
           </a:p>
         </p:txBody>
@@ -4099,7 +4055,7 @@
         </p:nvSpPr>
         <p:spPr>
           <a:xfrm>
-            <a:off x="5432688" y="2767479"/>
+            <a:off x="5464344" y="2876657"/>
             <a:ext cx="2026598" cy="365675"/>
           </a:xfrm>
           <a:prstGeom prst="rect">
@@ -4123,29 +4079,7 @@
                 <a:ea typeface="微软雅黑" panose="020B0503020204020204" pitchFamily="34" charset="-122"/>
                 <a:sym typeface="+mn-ea"/>
               </a:rPr>
-              <a:t>决策</a:t>
-            </a:r>
-            <a:endParaRPr lang="en-US" altLang="zh-CN" sz="1600" b="1" dirty="0">
-              <a:solidFill>
-                <a:srgbClr val="C00000"/>
-              </a:solidFill>
-              <a:latin typeface="微软雅黑" panose="020B0503020204020204" pitchFamily="34" charset="-122"/>
-              <a:ea typeface="微软雅黑" panose="020B0503020204020204" pitchFamily="34" charset="-122"/>
-              <a:sym typeface="+mn-ea"/>
-            </a:endParaRPr>
-          </a:p>
-          <a:p>
-            <a:pPr algn="ctr"/>
-            <a:r>
-              <a:rPr lang="zh-CN" altLang="en-US" sz="1600" b="1" dirty="0">
-                <a:solidFill>
-                  <a:srgbClr val="C00000"/>
-                </a:solidFill>
-                <a:latin typeface="微软雅黑" panose="020B0503020204020204" pitchFamily="34" charset="-122"/>
-                <a:ea typeface="微软雅黑" panose="020B0503020204020204" pitchFamily="34" charset="-122"/>
-                <a:sym typeface="+mn-ea"/>
-              </a:rPr>
-              <a:t>怎么快速、精准？</a:t>
+              <a:t>怎么快速决策？</a:t>
             </a:r>
           </a:p>
         </p:txBody>
@@ -5267,8 +5201,8 @@
         </p:nvSpPr>
         <p:spPr>
           <a:xfrm flipH="1">
-            <a:off x="8091042" y="1450340"/>
-            <a:ext cx="1976091" cy="5620327"/>
+            <a:off x="8091040" y="2017017"/>
+            <a:ext cx="1976091" cy="4848930"/>
           </a:xfrm>
           <a:prstGeom prst="roundRect">
             <a:avLst>
@@ -5324,7 +5258,7 @@
         </p:nvSpPr>
         <p:spPr>
           <a:xfrm>
-            <a:off x="7948750" y="1615505"/>
+            <a:off x="7989694" y="2161412"/>
             <a:ext cx="2171881" cy="523220"/>
           </a:xfrm>
           <a:prstGeom prst="rect">
@@ -5385,7 +5319,7 @@
         </p:nvSpPr>
         <p:spPr>
           <a:xfrm>
-            <a:off x="8370772" y="1133067"/>
+            <a:off x="8132053" y="1603829"/>
             <a:ext cx="1261884" cy="307777"/>
           </a:xfrm>
           <a:prstGeom prst="rect">
@@ -5434,8 +5368,8 @@
         </p:nvSpPr>
         <p:spPr>
           <a:xfrm>
-            <a:off x="8203348" y="2405083"/>
-            <a:ext cx="369332" cy="707886"/>
+            <a:off x="8203348" y="4202819"/>
+            <a:ext cx="369332" cy="1015663"/>
           </a:xfrm>
           <a:prstGeom prst="rect">
             <a:avLst/>
@@ -5457,7 +5391,7 @@
                 <a:latin typeface="微软雅黑" panose="020B0503020204020204" pitchFamily="34" charset="-122"/>
                 <a:ea typeface="微软雅黑" panose="020B0503020204020204" pitchFamily="34" charset="-122"/>
               </a:rPr>
-              <a:t>场景构建</a:t>
+              <a:t>场景环境构建</a:t>
             </a:r>
           </a:p>
         </p:txBody>
@@ -5476,8 +5410,8 @@
         </p:nvSpPr>
         <p:spPr>
           <a:xfrm>
-            <a:off x="8186140" y="3376335"/>
-            <a:ext cx="369332" cy="707886"/>
+            <a:off x="8186140" y="5481150"/>
+            <a:ext cx="369332" cy="1015663"/>
           </a:xfrm>
           <a:prstGeom prst="rect">
             <a:avLst/>
@@ -5505,55 +5439,7 @@
           <a:p>
             <a:r>
               <a:rPr lang="zh-CN" altLang="en-US" dirty="0"/>
-              <a:t>链路贯通</a:t>
-            </a:r>
-          </a:p>
-        </p:txBody>
-      </p:sp>
-      <p:sp>
-        <p:nvSpPr>
-          <p:cNvPr id="324" name="文本框 323">
-            <a:extLst>
-              <a:ext uri="{FF2B5EF4-FFF2-40B4-BE49-F238E27FC236}">
-                <a16:creationId xmlns:a16="http://schemas.microsoft.com/office/drawing/2014/main" id="{E97000C4-C5CB-A2C7-D991-B12A703D9A82}"/>
-              </a:ext>
-            </a:extLst>
-          </p:cNvPr>
-          <p:cNvSpPr txBox="1"/>
-          <p:nvPr/>
-        </p:nvSpPr>
-        <p:spPr>
-          <a:xfrm>
-            <a:off x="8221891" y="4659289"/>
-            <a:ext cx="369332" cy="707886"/>
-          </a:xfrm>
-          <a:prstGeom prst="rect">
-            <a:avLst/>
-          </a:prstGeom>
-          <a:noFill/>
-        </p:spPr>
-        <p:txBody>
-          <a:bodyPr vert="eaVert" wrap="none" rtlCol="0">
-            <a:spAutoFit/>
-          </a:bodyPr>
-          <a:lstStyle>
-            <a:defPPr>
-              <a:defRPr lang="en-US"/>
-            </a:defPPr>
-            <a:lvl1pPr algn="ctr">
-              <a:defRPr sz="1200" b="1">
-                <a:solidFill>
-                  <a:srgbClr val="2E54A1"/>
-                </a:solidFill>
-                <a:latin typeface="微软雅黑" panose="020B0503020204020204" pitchFamily="34" charset="-122"/>
-                <a:ea typeface="微软雅黑" panose="020B0503020204020204" pitchFamily="34" charset="-122"/>
-              </a:defRPr>
-            </a:lvl1pPr>
-          </a:lstStyle>
-          <a:p>
-            <a:r>
-              <a:rPr lang="zh-CN" altLang="en-US" dirty="0"/>
-              <a:t>提取存储</a:t>
+              <a:t>原型系统部署</a:t>
             </a:r>
           </a:p>
         </p:txBody>
@@ -5880,7 +5766,7 @@
                   <a:latin typeface="微软雅黑" panose="020B0503020204020204" pitchFamily="34" charset="-122"/>
                   <a:ea typeface="微软雅黑" panose="020B0503020204020204" pitchFamily="34" charset="-122"/>
                 </a:rPr>
-                <a:t>强海杂波干扰</a:t>
+                <a:t>海杂波下</a:t>
               </a:r>
             </a:p>
           </p:txBody>
@@ -5922,7 +5808,7 @@
                   <a:latin typeface="微软雅黑" panose="020B0503020204020204" pitchFamily="34" charset="-122"/>
                   <a:ea typeface="微软雅黑" panose="020B0503020204020204" pitchFamily="34" charset="-122"/>
                 </a:rPr>
-                <a:t>看不清、分不开、提不准</a:t>
+                <a:t>辐射目标“看不清”</a:t>
               </a:r>
               <a:endParaRPr lang="zh-CN" altLang="en-US" b="1" dirty="0">
                 <a:solidFill>
@@ -6013,10 +5899,9 @@
             </a:lstStyle>
             <a:p>
               <a:r>
-                <a:rPr lang="zh-CN" altLang="zh-CN" dirty="0"/>
-                <a:t>微弱频谱信号</a:t>
+                <a:rPr lang="zh-CN" altLang="en-US" dirty="0"/>
+                <a:t>微弱信号难感知</a:t>
               </a:r>
-              <a:endParaRPr lang="zh-CN" altLang="en-US" dirty="0"/>
             </a:p>
           </p:txBody>
         </p:sp>
@@ -6195,15 +6080,8 @@
                   <a:latin typeface="微软雅黑" panose="020B0503020204020204" pitchFamily="34" charset="-122"/>
                   <a:ea typeface="微软雅黑" panose="020B0503020204020204" pitchFamily="34" charset="-122"/>
                 </a:rPr>
-                <a:t>有限算力端侧</a:t>
+                <a:t>海量</a:t>
               </a:r>
-              <a:endParaRPr lang="zh-CN" altLang="en-US" sz="1200" b="1" dirty="0">
-                <a:solidFill>
-                  <a:srgbClr val="C00000"/>
-                </a:solidFill>
-                <a:latin typeface="微软雅黑" panose="020B0503020204020204" pitchFamily="34" charset="-122"/>
-                <a:ea typeface="微软雅黑" panose="020B0503020204020204" pitchFamily="34" charset="-122"/>
-              </a:endParaRPr>
             </a:p>
           </p:txBody>
         </p:sp>
@@ -6244,7 +6122,7 @@
                   <a:latin typeface="微软雅黑" panose="020B0503020204020204" pitchFamily="34" charset="-122"/>
                   <a:ea typeface="微软雅黑" panose="020B0503020204020204" pitchFamily="34" charset="-122"/>
                 </a:rPr>
-                <a:t>扛不住、查不快、信不过</a:t>
+                <a:t>留存取证“查得慢”</a:t>
               </a:r>
               <a:endParaRPr lang="zh-CN" altLang="en-US" b="1" dirty="0">
                 <a:solidFill>
@@ -6270,8 +6148,8 @@
           </p:nvSpPr>
           <p:spPr>
             <a:xfrm>
-              <a:off x="4267474" y="1757937"/>
-              <a:ext cx="1937502" cy="338554"/>
+              <a:off x="4120865" y="1761690"/>
+              <a:ext cx="2249433" cy="338554"/>
             </a:xfrm>
             <a:prstGeom prst="rect">
               <a:avLst/>
@@ -6299,7 +6177,7 @@
             <a:p>
               <a:r>
                 <a:rPr lang="zh-CN" altLang="en-US" dirty="0"/>
-                <a:t>海量频谱数据</a:t>
+                <a:t>频谱数据流难管理</a:t>
               </a:r>
             </a:p>
           </p:txBody>
@@ -6320,9 +6198,9 @@
         <p:grpSpPr>
           <a:xfrm>
             <a:off x="5300690" y="1168420"/>
-            <a:ext cx="2324963" cy="1478915"/>
+            <a:ext cx="2394486" cy="1478915"/>
             <a:chOff x="6505605" y="1168420"/>
-            <a:chExt cx="2779299" cy="1478915"/>
+            <a:chExt cx="2862408" cy="1478915"/>
           </a:xfrm>
         </p:grpSpPr>
         <p:sp>
@@ -6481,7 +6359,7 @@
                   <a:latin typeface="微软雅黑" panose="020B0503020204020204" pitchFamily="34" charset="-122"/>
                   <a:ea typeface="微软雅黑" panose="020B0503020204020204" pitchFamily="34" charset="-122"/>
                 </a:rPr>
-                <a:t>动态对抗环境</a:t>
+                <a:t>端侧环境</a:t>
               </a:r>
               <a:endParaRPr lang="zh-CN" altLang="en-US" sz="1200" b="1" dirty="0">
                 <a:solidFill>
@@ -6530,7 +6408,7 @@
                   <a:latin typeface="微软雅黑" panose="020B0503020204020204" pitchFamily="34" charset="-122"/>
                   <a:ea typeface="微软雅黑" panose="020B0503020204020204" pitchFamily="34" charset="-122"/>
                 </a:rPr>
-                <a:t>判不准、跟不上、协不稳</a:t>
+                <a:t>目标研判“效率低”</a:t>
               </a:r>
               <a:endParaRPr lang="zh-CN" altLang="en-US" b="1" dirty="0">
                 <a:solidFill>
@@ -6556,8 +6434,8 @@
           </p:nvSpPr>
           <p:spPr>
             <a:xfrm>
-              <a:off x="7203322" y="1741152"/>
-              <a:ext cx="1937502" cy="461665"/>
+              <a:off x="7203322" y="1722074"/>
+              <a:ext cx="2164691" cy="338554"/>
             </a:xfrm>
             <a:prstGeom prst="rect">
               <a:avLst/>
@@ -6585,19 +6463,9 @@
             <a:p>
               <a:r>
                 <a:rPr lang="zh-CN" altLang="en-US" dirty="0"/>
-                <a:t>智能认知决策</a:t>
+                <a:t>智能大模型难部署</a:t>
               </a:r>
               <a:endParaRPr lang="en-US" altLang="zh-CN" dirty="0"/>
-            </a:p>
-            <a:p>
-              <a:r>
-                <a:rPr lang="en-US" altLang="zh-CN" sz="700" dirty="0"/>
-                <a:t>or </a:t>
-              </a:r>
-              <a:r>
-                <a:rPr lang="zh-CN" altLang="en-US" sz="700" dirty="0"/>
-                <a:t>目标态势研判</a:t>
-              </a:r>
             </a:p>
           </p:txBody>
         </p:sp>
@@ -8380,267 +8248,6 @@
           </a:p>
         </p:txBody>
       </p:sp>
-      <p:cxnSp>
-        <p:nvCxnSpPr>
-          <p:cNvPr id="463" name="直接箭头连接符 462">
-            <a:extLst>
-              <a:ext uri="{FF2B5EF4-FFF2-40B4-BE49-F238E27FC236}">
-                <a16:creationId xmlns:a16="http://schemas.microsoft.com/office/drawing/2014/main" id="{468F02FB-FCE7-1C2D-BB84-66CE92F5C5B2}"/>
-              </a:ext>
-            </a:extLst>
-          </p:cNvPr>
-          <p:cNvCxnSpPr>
-            <a:cxnSpLocks/>
-          </p:cNvCxnSpPr>
-          <p:nvPr/>
-        </p:nvCxnSpPr>
-        <p:spPr>
-          <a:xfrm>
-            <a:off x="2370150" y="5415933"/>
-            <a:ext cx="427273" cy="852223"/>
-          </a:xfrm>
-          <a:prstGeom prst="straightConnector1">
-            <a:avLst/>
-          </a:prstGeom>
-          <a:ln w="38100">
-            <a:solidFill>
-              <a:srgbClr val="C00000"/>
-            </a:solidFill>
-            <a:tailEnd type="triangle"/>
-          </a:ln>
-        </p:spPr>
-        <p:style>
-          <a:lnRef idx="1">
-            <a:schemeClr val="accent1"/>
-          </a:lnRef>
-          <a:fillRef idx="0">
-            <a:schemeClr val="accent1"/>
-          </a:fillRef>
-          <a:effectRef idx="0">
-            <a:schemeClr val="accent1"/>
-          </a:effectRef>
-          <a:fontRef idx="minor">
-            <a:schemeClr val="tx1"/>
-          </a:fontRef>
-        </p:style>
-      </p:cxnSp>
-      <p:sp>
-        <p:nvSpPr>
-          <p:cNvPr id="464" name="文本框 463">
-            <a:extLst>
-              <a:ext uri="{FF2B5EF4-FFF2-40B4-BE49-F238E27FC236}">
-                <a16:creationId xmlns:a16="http://schemas.microsoft.com/office/drawing/2014/main" id="{1634B474-2996-7A16-DFD5-36FC3824E6AB}"/>
-              </a:ext>
-            </a:extLst>
-          </p:cNvPr>
-          <p:cNvSpPr txBox="1"/>
-          <p:nvPr/>
-        </p:nvSpPr>
-        <p:spPr>
-          <a:xfrm>
-            <a:off x="2563951" y="5388823"/>
-            <a:ext cx="694486" cy="642289"/>
-          </a:xfrm>
-          <a:prstGeom prst="rect">
-            <a:avLst/>
-          </a:prstGeom>
-          <a:noFill/>
-        </p:spPr>
-        <p:txBody>
-          <a:bodyPr wrap="square" rtlCol="0">
-            <a:noAutofit/>
-          </a:bodyPr>
-          <a:lstStyle/>
-          <a:p>
-            <a:pPr algn="ctr"/>
-            <a:r>
-              <a:rPr lang="zh-CN" altLang="en-US" b="1" dirty="0">
-                <a:solidFill>
-                  <a:srgbClr val="C00000"/>
-                </a:solidFill>
-                <a:latin typeface="微软雅黑" panose="020B0503020204020204" pitchFamily="34" charset="-122"/>
-                <a:ea typeface="微软雅黑" panose="020B0503020204020204" pitchFamily="34" charset="-122"/>
-                <a:sym typeface="+mn-ea"/>
-              </a:rPr>
-              <a:t>精确提取</a:t>
-            </a:r>
-          </a:p>
-        </p:txBody>
-      </p:sp>
-      <p:cxnSp>
-        <p:nvCxnSpPr>
-          <p:cNvPr id="467" name="直接箭头连接符 466">
-            <a:extLst>
-              <a:ext uri="{FF2B5EF4-FFF2-40B4-BE49-F238E27FC236}">
-                <a16:creationId xmlns:a16="http://schemas.microsoft.com/office/drawing/2014/main" id="{53AB5EE7-F154-1701-E602-0FA8098B9D39}"/>
-              </a:ext>
-            </a:extLst>
-          </p:cNvPr>
-          <p:cNvCxnSpPr>
-            <a:cxnSpLocks/>
-          </p:cNvCxnSpPr>
-          <p:nvPr/>
-        </p:nvCxnSpPr>
-        <p:spPr>
-          <a:xfrm>
-            <a:off x="4832665" y="5376049"/>
-            <a:ext cx="427273" cy="852223"/>
-          </a:xfrm>
-          <a:prstGeom prst="straightConnector1">
-            <a:avLst/>
-          </a:prstGeom>
-          <a:ln w="38100">
-            <a:solidFill>
-              <a:srgbClr val="C00000"/>
-            </a:solidFill>
-            <a:tailEnd type="triangle"/>
-          </a:ln>
-        </p:spPr>
-        <p:style>
-          <a:lnRef idx="1">
-            <a:schemeClr val="accent1"/>
-          </a:lnRef>
-          <a:fillRef idx="0">
-            <a:schemeClr val="accent1"/>
-          </a:fillRef>
-          <a:effectRef idx="0">
-            <a:schemeClr val="accent1"/>
-          </a:effectRef>
-          <a:fontRef idx="minor">
-            <a:schemeClr val="tx1"/>
-          </a:fontRef>
-        </p:style>
-      </p:cxnSp>
-      <p:sp>
-        <p:nvSpPr>
-          <p:cNvPr id="468" name="文本框 467">
-            <a:extLst>
-              <a:ext uri="{FF2B5EF4-FFF2-40B4-BE49-F238E27FC236}">
-                <a16:creationId xmlns:a16="http://schemas.microsoft.com/office/drawing/2014/main" id="{9E41FEC3-8DBB-7BFC-D63C-66F4A8A9E6AC}"/>
-              </a:ext>
-            </a:extLst>
-          </p:cNvPr>
-          <p:cNvSpPr txBox="1"/>
-          <p:nvPr/>
-        </p:nvSpPr>
-        <p:spPr>
-          <a:xfrm>
-            <a:off x="5026466" y="5348939"/>
-            <a:ext cx="694486" cy="642289"/>
-          </a:xfrm>
-          <a:prstGeom prst="rect">
-            <a:avLst/>
-          </a:prstGeom>
-          <a:noFill/>
-        </p:spPr>
-        <p:txBody>
-          <a:bodyPr wrap="square" rtlCol="0">
-            <a:noAutofit/>
-          </a:bodyPr>
-          <a:lstStyle/>
-          <a:p>
-            <a:pPr algn="ctr"/>
-            <a:r>
-              <a:rPr lang="zh-CN" altLang="en-US" b="1" dirty="0">
-                <a:solidFill>
-                  <a:srgbClr val="C00000"/>
-                </a:solidFill>
-                <a:latin typeface="微软雅黑" panose="020B0503020204020204" pitchFamily="34" charset="-122"/>
-                <a:ea typeface="微软雅黑" panose="020B0503020204020204" pitchFamily="34" charset="-122"/>
-                <a:sym typeface="+mn-ea"/>
-              </a:rPr>
-              <a:t>可信追溯</a:t>
-            </a:r>
-          </a:p>
-        </p:txBody>
-      </p:sp>
-      <p:cxnSp>
-        <p:nvCxnSpPr>
-          <p:cNvPr id="469" name="直接箭头连接符 468">
-            <a:extLst>
-              <a:ext uri="{FF2B5EF4-FFF2-40B4-BE49-F238E27FC236}">
-                <a16:creationId xmlns:a16="http://schemas.microsoft.com/office/drawing/2014/main" id="{D7BBFA1E-4D5E-28F1-406E-E9CEF0C0FA1F}"/>
-              </a:ext>
-            </a:extLst>
-          </p:cNvPr>
-          <p:cNvCxnSpPr>
-            <a:cxnSpLocks/>
-          </p:cNvCxnSpPr>
-          <p:nvPr/>
-        </p:nvCxnSpPr>
-        <p:spPr>
-          <a:xfrm>
-            <a:off x="6966483" y="5376049"/>
-            <a:ext cx="427273" cy="852223"/>
-          </a:xfrm>
-          <a:prstGeom prst="straightConnector1">
-            <a:avLst/>
-          </a:prstGeom>
-          <a:ln w="38100">
-            <a:solidFill>
-              <a:srgbClr val="C00000"/>
-            </a:solidFill>
-            <a:tailEnd type="triangle"/>
-          </a:ln>
-        </p:spPr>
-        <p:style>
-          <a:lnRef idx="1">
-            <a:schemeClr val="accent1"/>
-          </a:lnRef>
-          <a:fillRef idx="0">
-            <a:schemeClr val="accent1"/>
-          </a:fillRef>
-          <a:effectRef idx="0">
-            <a:schemeClr val="accent1"/>
-          </a:effectRef>
-          <a:fontRef idx="minor">
-            <a:schemeClr val="tx1"/>
-          </a:fontRef>
-        </p:style>
-      </p:cxnSp>
-      <p:sp>
-        <p:nvSpPr>
-          <p:cNvPr id="470" name="文本框 469">
-            <a:extLst>
-              <a:ext uri="{FF2B5EF4-FFF2-40B4-BE49-F238E27FC236}">
-                <a16:creationId xmlns:a16="http://schemas.microsoft.com/office/drawing/2014/main" id="{DEA63A6D-3D55-4310-44FE-41576C5A6859}"/>
-              </a:ext>
-            </a:extLst>
-          </p:cNvPr>
-          <p:cNvSpPr txBox="1"/>
-          <p:nvPr/>
-        </p:nvSpPr>
-        <p:spPr>
-          <a:xfrm>
-            <a:off x="7160284" y="5348939"/>
-            <a:ext cx="694486" cy="642289"/>
-          </a:xfrm>
-          <a:prstGeom prst="rect">
-            <a:avLst/>
-          </a:prstGeom>
-          <a:noFill/>
-        </p:spPr>
-        <p:txBody>
-          <a:bodyPr wrap="square" rtlCol="0">
-            <a:noAutofit/>
-          </a:bodyPr>
-          <a:lstStyle/>
-          <a:p>
-            <a:pPr algn="ctr"/>
-            <a:r>
-              <a:rPr lang="zh-CN" altLang="en-US" b="1" dirty="0">
-                <a:solidFill>
-                  <a:srgbClr val="C00000"/>
-                </a:solidFill>
-                <a:latin typeface="微软雅黑" panose="020B0503020204020204" pitchFamily="34" charset="-122"/>
-                <a:ea typeface="微软雅黑" panose="020B0503020204020204" pitchFamily="34" charset="-122"/>
-                <a:sym typeface="+mn-ea"/>
-              </a:rPr>
-              <a:t>协同决策</a:t>
-            </a:r>
-          </a:p>
-        </p:txBody>
-      </p:sp>
       <p:sp>
         <p:nvSpPr>
           <p:cNvPr id="473" name="文本框 472">
@@ -8655,8 +8262,8 @@
         </p:nvSpPr>
         <p:spPr>
           <a:xfrm>
-            <a:off x="8213935" y="5979936"/>
-            <a:ext cx="369332" cy="707886"/>
+            <a:off x="8185618" y="2819160"/>
+            <a:ext cx="369332" cy="1015663"/>
           </a:xfrm>
           <a:prstGeom prst="rect">
             <a:avLst/>
@@ -8684,17 +8291,160 @@
           <a:p>
             <a:r>
               <a:rPr lang="zh-CN" altLang="en-US" dirty="0"/>
-              <a:t>智能闭环</a:t>
-            </a:r>
-          </a:p>
-        </p:txBody>
-      </p:sp>
-      <p:sp>
-        <p:nvSpPr>
-          <p:cNvPr id="479" name="矩形: 圆角 478">
+              <a:t>原型运行验证</a:t>
+            </a:r>
+          </a:p>
+        </p:txBody>
+      </p:sp>
+      <p:pic>
+        <p:nvPicPr>
+          <p:cNvPr id="9" name="图片 8" descr="User uploaded image 1">
             <a:extLst>
               <a:ext uri="{FF2B5EF4-FFF2-40B4-BE49-F238E27FC236}">
-                <a16:creationId xmlns:a16="http://schemas.microsoft.com/office/drawing/2014/main" id="{F70DC18C-D71B-D52B-930F-C0CE40E8F606}"/>
+                <a16:creationId xmlns:a16="http://schemas.microsoft.com/office/drawing/2014/main" id="{89048574-3403-5AC5-6D04-B0AEC4B77997}"/>
+              </a:ext>
+            </a:extLst>
+          </p:cNvPr>
+          <p:cNvPicPr>
+            <a:picLocks noChangeAspect="1"/>
+          </p:cNvPicPr>
+          <p:nvPr/>
+        </p:nvPicPr>
+        <p:blipFill>
+          <a:blip r:embed="rId6"/>
+          <a:srcRect l="383" t="5881" r="4231" b="13433"/>
+          <a:stretch>
+            <a:fillRect/>
+          </a:stretch>
+        </p:blipFill>
+        <p:spPr>
+          <a:xfrm>
+            <a:off x="8578216" y="4179570"/>
+            <a:ext cx="1378585" cy="963269"/>
+          </a:xfrm>
+          <a:custGeom>
+            <a:avLst/>
+            <a:gdLst>
+              <a:gd name="csX0" fmla="*/ 155013 w 1378585"/>
+              <a:gd name="csY0" fmla="*/ 0 h 963269"/>
+              <a:gd name="csX1" fmla="*/ 1218037 w 1378585"/>
+              <a:gd name="csY1" fmla="*/ 0 h 963269"/>
+              <a:gd name="csX2" fmla="*/ 1378585 w 1378585"/>
+              <a:gd name="csY2" fmla="*/ 160548 h 963269"/>
+              <a:gd name="csX3" fmla="*/ 1378585 w 1378585"/>
+              <a:gd name="csY3" fmla="*/ 802721 h 963269"/>
+              <a:gd name="csX4" fmla="*/ 1218037 w 1378585"/>
+              <a:gd name="csY4" fmla="*/ 963269 h 963269"/>
+              <a:gd name="csX5" fmla="*/ 155013 w 1378585"/>
+              <a:gd name="csY5" fmla="*/ 963269 h 963269"/>
+              <a:gd name="csX6" fmla="*/ 7082 w 1378585"/>
+              <a:gd name="csY6" fmla="*/ 865214 h 963269"/>
+              <a:gd name="csX7" fmla="*/ 0 w 1378585"/>
+              <a:gd name="csY7" fmla="*/ 830137 h 963269"/>
+              <a:gd name="csX8" fmla="*/ 0 w 1378585"/>
+              <a:gd name="csY8" fmla="*/ 133132 h 963269"/>
+              <a:gd name="csX9" fmla="*/ 7082 w 1378585"/>
+              <a:gd name="csY9" fmla="*/ 98056 h 963269"/>
+              <a:gd name="csX10" fmla="*/ 155013 w 1378585"/>
+              <a:gd name="csY10" fmla="*/ 0 h 963269"/>
+            </a:gdLst>
+            <a:ahLst/>
+            <a:cxnLst>
+              <a:cxn ang="0">
+                <a:pos x="csX0" y="csY0"/>
+              </a:cxn>
+              <a:cxn ang="0">
+                <a:pos x="csX1" y="csY1"/>
+              </a:cxn>
+              <a:cxn ang="0">
+                <a:pos x="csX2" y="csY2"/>
+              </a:cxn>
+              <a:cxn ang="0">
+                <a:pos x="csX3" y="csY3"/>
+              </a:cxn>
+              <a:cxn ang="0">
+                <a:pos x="csX4" y="csY4"/>
+              </a:cxn>
+              <a:cxn ang="0">
+                <a:pos x="csX5" y="csY5"/>
+              </a:cxn>
+              <a:cxn ang="0">
+                <a:pos x="csX6" y="csY6"/>
+              </a:cxn>
+              <a:cxn ang="0">
+                <a:pos x="csX7" y="csY7"/>
+              </a:cxn>
+              <a:cxn ang="0">
+                <a:pos x="csX8" y="csY8"/>
+              </a:cxn>
+              <a:cxn ang="0">
+                <a:pos x="csX9" y="csY9"/>
+              </a:cxn>
+              <a:cxn ang="0">
+                <a:pos x="csX10" y="csY10"/>
+              </a:cxn>
+            </a:cxnLst>
+            <a:rect l="l" t="t" r="r" b="b"/>
+            <a:pathLst>
+              <a:path w="1378585" h="963269">
+                <a:moveTo>
+                  <a:pt x="155013" y="0"/>
+                </a:moveTo>
+                <a:lnTo>
+                  <a:pt x="1218037" y="0"/>
+                </a:lnTo>
+                <a:cubicBezTo>
+                  <a:pt x="1306705" y="0"/>
+                  <a:pt x="1378585" y="71880"/>
+                  <a:pt x="1378585" y="160548"/>
+                </a:cubicBezTo>
+                <a:lnTo>
+                  <a:pt x="1378585" y="802721"/>
+                </a:lnTo>
+                <a:cubicBezTo>
+                  <a:pt x="1378585" y="891389"/>
+                  <a:pt x="1306705" y="963269"/>
+                  <a:pt x="1218037" y="963269"/>
+                </a:cubicBezTo>
+                <a:lnTo>
+                  <a:pt x="155013" y="963269"/>
+                </a:lnTo>
+                <a:cubicBezTo>
+                  <a:pt x="88512" y="963269"/>
+                  <a:pt x="31454" y="922837"/>
+                  <a:pt x="7082" y="865214"/>
+                </a:cubicBezTo>
+                <a:lnTo>
+                  <a:pt x="0" y="830137"/>
+                </a:lnTo>
+                <a:lnTo>
+                  <a:pt x="0" y="133132"/>
+                </a:lnTo>
+                <a:lnTo>
+                  <a:pt x="7082" y="98056"/>
+                </a:lnTo>
+                <a:cubicBezTo>
+                  <a:pt x="31454" y="40433"/>
+                  <a:pt x="88512" y="0"/>
+                  <a:pt x="155013" y="0"/>
+                </a:cubicBezTo>
+                <a:close/>
+              </a:path>
+            </a:pathLst>
+          </a:custGeom>
+          <a:ln>
+            <a:solidFill>
+              <a:srgbClr val="2E54A1"/>
+            </a:solidFill>
+          </a:ln>
+        </p:spPr>
+      </p:pic>
+      <p:sp>
+        <p:nvSpPr>
+          <p:cNvPr id="2" name="箭头: 燕尾形 1202">
+            <a:extLst>
+              <a:ext uri="{FF2B5EF4-FFF2-40B4-BE49-F238E27FC236}">
+                <a16:creationId xmlns:a16="http://schemas.microsoft.com/office/drawing/2014/main" id="{E6D3E40E-6980-A4D8-E7BF-38952D214FC4}"/>
               </a:ext>
             </a:extLst>
           </p:cNvPr>
@@ -8702,20 +8452,28 @@
           <p:nvPr/>
         </p:nvSpPr>
         <p:spPr>
-          <a:xfrm>
-            <a:off x="8572680" y="2227943"/>
-            <a:ext cx="1384120" cy="963269"/>
-          </a:xfrm>
-          <a:prstGeom prst="roundRect">
+          <a:xfrm rot="16200000" flipH="1">
+            <a:off x="9459517" y="1176284"/>
+            <a:ext cx="617454" cy="658830"/>
+          </a:xfrm>
+          <a:prstGeom prst="notchedRightArrow">
             <a:avLst/>
           </a:prstGeom>
-          <a:solidFill>
-            <a:schemeClr val="bg1"/>
-          </a:solidFill>
-          <a:ln w="38100">
-            <a:solidFill>
-              <a:srgbClr val="2E54A1"/>
-            </a:solidFill>
+          <a:gradFill>
+            <a:gsLst>
+              <a:gs pos="100000">
+                <a:srgbClr val="C00000"/>
+              </a:gs>
+              <a:gs pos="5000">
+                <a:srgbClr val="C00000">
+                  <a:alpha val="0"/>
+                </a:srgbClr>
+              </a:gs>
+            </a:gsLst>
+            <a:lin ang="0" scaled="0"/>
+          </a:gradFill>
+          <a:ln>
+            <a:noFill/>
           </a:ln>
         </p:spPr>
         <p:style>
@@ -8738,173 +8496,396 @@
           <a:bodyPr rtlCol="0" anchor="ctr"/>
           <a:lstStyle/>
           <a:p>
-            <a:pPr algn="ctr"/>
-            <a:endParaRPr lang="zh-CN" altLang="en-US"/>
-          </a:p>
-        </p:txBody>
-      </p:sp>
-      <p:sp>
-        <p:nvSpPr>
-          <p:cNvPr id="481" name="矩形: 圆角 480">
+            <a:pPr marL="0" marR="0" lvl="0" indent="0" algn="ctr" defTabSz="914400" rtl="0" eaLnBrk="1" fontAlgn="auto" latinLnBrk="0" hangingPunct="1">
+              <a:lnSpc>
+                <a:spcPct val="100000"/>
+              </a:lnSpc>
+              <a:spcBef>
+                <a:spcPts val="0"/>
+              </a:spcBef>
+              <a:spcAft>
+                <a:spcPts val="0"/>
+              </a:spcAft>
+              <a:buClrTx/>
+              <a:buSzTx/>
+              <a:buFontTx/>
+              <a:buNone/>
+              <a:defRPr/>
+            </a:pPr>
+            <a:endParaRPr kumimoji="0" lang="zh-CN" altLang="en-US" sz="2235" b="0" i="0" u="none" strike="noStrike" kern="1200" cap="none" spc="0" normalizeH="0" baseline="0" noProof="0">
+              <a:ln>
+                <a:noFill/>
+              </a:ln>
+              <a:solidFill>
+                <a:prstClr val="white"/>
+              </a:solidFill>
+              <a:effectLst/>
+              <a:uLnTx/>
+              <a:uFillTx/>
+              <a:latin typeface="等线" panose="02010600030101010101" charset="-122"/>
+              <a:ea typeface="等线" panose="02010600030101010101" charset="-122"/>
+              <a:cs typeface="+mn-cs"/>
+            </a:endParaRPr>
+          </a:p>
+        </p:txBody>
+      </p:sp>
+      <p:sp>
+        <p:nvSpPr>
+          <p:cNvPr id="21" name="文本框 20">
             <a:extLst>
               <a:ext uri="{FF2B5EF4-FFF2-40B4-BE49-F238E27FC236}">
-                <a16:creationId xmlns:a16="http://schemas.microsoft.com/office/drawing/2014/main" id="{945D6A14-C2BC-4146-06C1-ECB4D294C5FB}"/>
+                <a16:creationId xmlns:a16="http://schemas.microsoft.com/office/drawing/2014/main" id="{4939B5C9-97DC-F96D-5C4C-AE951C743591}"/>
               </a:ext>
             </a:extLst>
           </p:cNvPr>
-          <p:cNvSpPr/>
+          <p:cNvSpPr txBox="1"/>
           <p:nvPr/>
         </p:nvSpPr>
         <p:spPr>
           <a:xfrm>
-            <a:off x="8572680" y="3351578"/>
-            <a:ext cx="1384120" cy="963269"/>
-          </a:xfrm>
-          <a:prstGeom prst="roundRect">
+            <a:off x="7771745" y="1170024"/>
+            <a:ext cx="2026598" cy="365675"/>
+          </a:xfrm>
+          <a:prstGeom prst="rect">
             <a:avLst/>
           </a:prstGeom>
-          <a:solidFill>
-            <a:schemeClr val="bg1"/>
-          </a:solidFill>
-          <a:ln w="38100">
+          <a:noFill/>
+        </p:spPr>
+        <p:txBody>
+          <a:bodyPr wrap="square" rtlCol="0">
+            <a:noAutofit/>
+          </a:bodyPr>
+          <a:lstStyle/>
+          <a:p>
+            <a:pPr algn="ctr"/>
+            <a:r>
+              <a:rPr lang="zh-CN" altLang="en-US" sz="1600" b="1" dirty="0">
+                <a:solidFill>
+                  <a:srgbClr val="C00000"/>
+                </a:solidFill>
+                <a:latin typeface="微软雅黑" panose="020B0503020204020204" pitchFamily="34" charset="-122"/>
+                <a:ea typeface="微软雅黑" panose="020B0503020204020204" pitchFamily="34" charset="-122"/>
+                <a:sym typeface="+mn-ea"/>
+              </a:rPr>
+              <a:t>实验验证</a:t>
+            </a:r>
+          </a:p>
+        </p:txBody>
+      </p:sp>
+      <p:pic>
+        <p:nvPicPr>
+          <p:cNvPr id="52" name="图片 51">
+            <a:extLst>
+              <a:ext uri="{FF2B5EF4-FFF2-40B4-BE49-F238E27FC236}">
+                <a16:creationId xmlns:a16="http://schemas.microsoft.com/office/drawing/2014/main" id="{4E61B898-D60F-F6CB-47DC-D7BA778CE2C0}"/>
+              </a:ext>
+            </a:extLst>
+          </p:cNvPr>
+          <p:cNvPicPr>
+            <a:picLocks noChangeAspect="1"/>
+          </p:cNvPicPr>
+          <p:nvPr/>
+        </p:nvPicPr>
+        <p:blipFill>
+          <a:blip r:embed="rId7" cstate="print">
+            <a:extLst>
+              <a:ext uri="{28A0092B-C50C-407E-A947-70E740481C1C}">
+                <a14:useLocalDpi xmlns:a14="http://schemas.microsoft.com/office/drawing/2010/main" val="0"/>
+              </a:ext>
+            </a:extLst>
+          </a:blip>
+          <a:srcRect l="1412" r="1412"/>
+          <a:stretch>
+            <a:fillRect/>
+          </a:stretch>
+        </p:blipFill>
+        <p:spPr>
+          <a:xfrm>
+            <a:off x="8572680" y="2846919"/>
+            <a:ext cx="1384120" cy="948834"/>
+          </a:xfrm>
+          <a:custGeom>
+            <a:avLst/>
+            <a:gdLst>
+              <a:gd name="csX0" fmla="*/ 95359 w 1384120"/>
+              <a:gd name="csY0" fmla="*/ 0 h 948834"/>
+              <a:gd name="csX1" fmla="*/ 1288761 w 1384120"/>
+              <a:gd name="csY1" fmla="*/ 0 h 948834"/>
+              <a:gd name="csX2" fmla="*/ 1337096 w 1384120"/>
+              <a:gd name="csY2" fmla="*/ 32589 h 948834"/>
+              <a:gd name="csX3" fmla="*/ 1384120 w 1384120"/>
+              <a:gd name="csY3" fmla="*/ 146113 h 948834"/>
+              <a:gd name="csX4" fmla="*/ 1384120 w 1384120"/>
+              <a:gd name="csY4" fmla="*/ 788286 h 948834"/>
+              <a:gd name="csX5" fmla="*/ 1223572 w 1384120"/>
+              <a:gd name="csY5" fmla="*/ 948834 h 948834"/>
+              <a:gd name="csX6" fmla="*/ 160548 w 1384120"/>
+              <a:gd name="csY6" fmla="*/ 948834 h 948834"/>
+              <a:gd name="csX7" fmla="*/ 0 w 1384120"/>
+              <a:gd name="csY7" fmla="*/ 788286 h 948834"/>
+              <a:gd name="csX8" fmla="*/ 0 w 1384120"/>
+              <a:gd name="csY8" fmla="*/ 146113 h 948834"/>
+              <a:gd name="csX9" fmla="*/ 47024 w 1384120"/>
+              <a:gd name="csY9" fmla="*/ 32589 h 948834"/>
+            </a:gdLst>
+            <a:ahLst/>
+            <a:cxnLst>
+              <a:cxn ang="0">
+                <a:pos x="csX0" y="csY0"/>
+              </a:cxn>
+              <a:cxn ang="0">
+                <a:pos x="csX1" y="csY1"/>
+              </a:cxn>
+              <a:cxn ang="0">
+                <a:pos x="csX2" y="csY2"/>
+              </a:cxn>
+              <a:cxn ang="0">
+                <a:pos x="csX3" y="csY3"/>
+              </a:cxn>
+              <a:cxn ang="0">
+                <a:pos x="csX4" y="csY4"/>
+              </a:cxn>
+              <a:cxn ang="0">
+                <a:pos x="csX5" y="csY5"/>
+              </a:cxn>
+              <a:cxn ang="0">
+                <a:pos x="csX6" y="csY6"/>
+              </a:cxn>
+              <a:cxn ang="0">
+                <a:pos x="csX7" y="csY7"/>
+              </a:cxn>
+              <a:cxn ang="0">
+                <a:pos x="csX8" y="csY8"/>
+              </a:cxn>
+              <a:cxn ang="0">
+                <a:pos x="csX9" y="csY9"/>
+              </a:cxn>
+            </a:cxnLst>
+            <a:rect l="l" t="t" r="r" b="b"/>
+            <a:pathLst>
+              <a:path w="1384120" h="948834">
+                <a:moveTo>
+                  <a:pt x="95359" y="0"/>
+                </a:moveTo>
+                <a:lnTo>
+                  <a:pt x="1288761" y="0"/>
+                </a:lnTo>
+                <a:lnTo>
+                  <a:pt x="1337096" y="32589"/>
+                </a:lnTo>
+                <a:cubicBezTo>
+                  <a:pt x="1366150" y="61642"/>
+                  <a:pt x="1384120" y="101779"/>
+                  <a:pt x="1384120" y="146113"/>
+                </a:cubicBezTo>
+                <a:lnTo>
+                  <a:pt x="1384120" y="788286"/>
+                </a:lnTo>
+                <a:cubicBezTo>
+                  <a:pt x="1384120" y="876954"/>
+                  <a:pt x="1312240" y="948834"/>
+                  <a:pt x="1223572" y="948834"/>
+                </a:cubicBezTo>
+                <a:lnTo>
+                  <a:pt x="160548" y="948834"/>
+                </a:lnTo>
+                <a:cubicBezTo>
+                  <a:pt x="71880" y="948834"/>
+                  <a:pt x="0" y="876954"/>
+                  <a:pt x="0" y="788286"/>
+                </a:cubicBezTo>
+                <a:lnTo>
+                  <a:pt x="0" y="146113"/>
+                </a:lnTo>
+                <a:cubicBezTo>
+                  <a:pt x="0" y="101779"/>
+                  <a:pt x="17970" y="61642"/>
+                  <a:pt x="47024" y="32589"/>
+                </a:cubicBezTo>
+                <a:close/>
+              </a:path>
+            </a:pathLst>
+          </a:custGeom>
+          <a:ln>
             <a:solidFill>
               <a:srgbClr val="2E54A1"/>
             </a:solidFill>
           </a:ln>
         </p:spPr>
-        <p:style>
-          <a:lnRef idx="2">
-            <a:schemeClr val="accent1">
-              <a:shade val="15000"/>
-            </a:schemeClr>
-          </a:lnRef>
-          <a:fillRef idx="1">
-            <a:schemeClr val="accent1"/>
-          </a:fillRef>
-          <a:effectRef idx="0">
-            <a:schemeClr val="accent1"/>
-          </a:effectRef>
-          <a:fontRef idx="minor">
-            <a:schemeClr val="lt1"/>
-          </a:fontRef>
-        </p:style>
-        <p:txBody>
-          <a:bodyPr rtlCol="0" anchor="ctr"/>
-          <a:lstStyle/>
-          <a:p>
-            <a:pPr algn="ctr"/>
-            <a:endParaRPr lang="zh-CN" altLang="en-US"/>
-          </a:p>
-        </p:txBody>
-      </p:sp>
-      <p:sp>
-        <p:nvSpPr>
-          <p:cNvPr id="482" name="矩形: 圆角 481">
+      </p:pic>
+      <p:pic>
+        <p:nvPicPr>
+          <p:cNvPr id="62" name="图片 61">
             <a:extLst>
               <a:ext uri="{FF2B5EF4-FFF2-40B4-BE49-F238E27FC236}">
-                <a16:creationId xmlns:a16="http://schemas.microsoft.com/office/drawing/2014/main" id="{BFC863F4-3ACA-BEE9-4DAA-A5A15CF74B7A}"/>
+                <a16:creationId xmlns:a16="http://schemas.microsoft.com/office/drawing/2014/main" id="{DD7505F0-AB30-AEBF-62EE-53C316D9907A}"/>
               </a:ext>
             </a:extLst>
           </p:cNvPr>
-          <p:cNvSpPr/>
+          <p:cNvPicPr>
+            <a:picLocks noChangeAspect="1"/>
+          </p:cNvPicPr>
           <p:nvPr/>
-        </p:nvSpPr>
+        </p:nvPicPr>
+        <p:blipFill>
+          <a:blip r:embed="rId8" cstate="print">
+            <a:extLst>
+              <a:ext uri="{28A0092B-C50C-407E-A947-70E740481C1C}">
+                <a14:useLocalDpi xmlns:a14="http://schemas.microsoft.com/office/drawing/2010/main" val="0"/>
+              </a:ext>
+            </a:extLst>
+          </a:blip>
+          <a:srcRect l="118"/>
+          <a:stretch>
+            <a:fillRect/>
+          </a:stretch>
+        </p:blipFill>
         <p:spPr>
           <a:xfrm>
-            <a:off x="8591223" y="4594464"/>
-            <a:ext cx="1384120" cy="963269"/>
-          </a:xfrm>
-          <a:prstGeom prst="roundRect">
+            <a:off x="8608122" y="5574594"/>
+            <a:ext cx="1382482" cy="922037"/>
+          </a:xfrm>
+          <a:custGeom>
             <a:avLst/>
-          </a:prstGeom>
-          <a:solidFill>
-            <a:schemeClr val="bg1"/>
-          </a:solidFill>
-          <a:ln w="38100">
+            <a:gdLst>
+              <a:gd name="csX0" fmla="*/ 86193 w 1382482"/>
+              <a:gd name="csY0" fmla="*/ 0 h 922037"/>
+              <a:gd name="csX1" fmla="*/ 1297928 w 1382482"/>
+              <a:gd name="csY1" fmla="*/ 0 h 922037"/>
+              <a:gd name="csX2" fmla="*/ 1337096 w 1382482"/>
+              <a:gd name="csY2" fmla="*/ 26409 h 922037"/>
+              <a:gd name="csX3" fmla="*/ 1371503 w 1382482"/>
+              <a:gd name="csY3" fmla="*/ 77441 h 922037"/>
+              <a:gd name="csX4" fmla="*/ 1382482 w 1382482"/>
+              <a:gd name="csY4" fmla="*/ 131820 h 922037"/>
+              <a:gd name="csX5" fmla="*/ 1382482 w 1382482"/>
+              <a:gd name="csY5" fmla="*/ 790219 h 922037"/>
+              <a:gd name="csX6" fmla="*/ 1371503 w 1382482"/>
+              <a:gd name="csY6" fmla="*/ 844599 h 922037"/>
+              <a:gd name="csX7" fmla="*/ 1337096 w 1382482"/>
+              <a:gd name="csY7" fmla="*/ 895631 h 922037"/>
+              <a:gd name="csX8" fmla="*/ 1297930 w 1382482"/>
+              <a:gd name="csY8" fmla="*/ 922037 h 922037"/>
+              <a:gd name="csX9" fmla="*/ 86190 w 1382482"/>
+              <a:gd name="csY9" fmla="*/ 922037 h 922037"/>
+              <a:gd name="csX10" fmla="*/ 47024 w 1382482"/>
+              <a:gd name="csY10" fmla="*/ 895631 h 922037"/>
+              <a:gd name="csX11" fmla="*/ 0 w 1382482"/>
+              <a:gd name="csY11" fmla="*/ 782106 h 922037"/>
+              <a:gd name="csX12" fmla="*/ 0 w 1382482"/>
+              <a:gd name="csY12" fmla="*/ 139933 h 922037"/>
+              <a:gd name="csX13" fmla="*/ 47024 w 1382482"/>
+              <a:gd name="csY13" fmla="*/ 26409 h 922037"/>
+            </a:gdLst>
+            <a:ahLst/>
+            <a:cxnLst>
+              <a:cxn ang="0">
+                <a:pos x="csX0" y="csY0"/>
+              </a:cxn>
+              <a:cxn ang="0">
+                <a:pos x="csX1" y="csY1"/>
+              </a:cxn>
+              <a:cxn ang="0">
+                <a:pos x="csX2" y="csY2"/>
+              </a:cxn>
+              <a:cxn ang="0">
+                <a:pos x="csX3" y="csY3"/>
+              </a:cxn>
+              <a:cxn ang="0">
+                <a:pos x="csX4" y="csY4"/>
+              </a:cxn>
+              <a:cxn ang="0">
+                <a:pos x="csX5" y="csY5"/>
+              </a:cxn>
+              <a:cxn ang="0">
+                <a:pos x="csX6" y="csY6"/>
+              </a:cxn>
+              <a:cxn ang="0">
+                <a:pos x="csX7" y="csY7"/>
+              </a:cxn>
+              <a:cxn ang="0">
+                <a:pos x="csX8" y="csY8"/>
+              </a:cxn>
+              <a:cxn ang="0">
+                <a:pos x="csX9" y="csY9"/>
+              </a:cxn>
+              <a:cxn ang="0">
+                <a:pos x="csX10" y="csY10"/>
+              </a:cxn>
+              <a:cxn ang="0">
+                <a:pos x="csX11" y="csY11"/>
+              </a:cxn>
+              <a:cxn ang="0">
+                <a:pos x="csX12" y="csY12"/>
+              </a:cxn>
+              <a:cxn ang="0">
+                <a:pos x="csX13" y="csY13"/>
+              </a:cxn>
+            </a:cxnLst>
+            <a:rect l="l" t="t" r="r" b="b"/>
+            <a:pathLst>
+              <a:path w="1382482" h="922037">
+                <a:moveTo>
+                  <a:pt x="86193" y="0"/>
+                </a:moveTo>
+                <a:lnTo>
+                  <a:pt x="1297928" y="0"/>
+                </a:lnTo>
+                <a:lnTo>
+                  <a:pt x="1337096" y="26409"/>
+                </a:lnTo>
+                <a:cubicBezTo>
+                  <a:pt x="1351623" y="40936"/>
+                  <a:pt x="1363379" y="58233"/>
+                  <a:pt x="1371503" y="77441"/>
+                </a:cubicBezTo>
+                <a:lnTo>
+                  <a:pt x="1382482" y="131820"/>
+                </a:lnTo>
+                <a:lnTo>
+                  <a:pt x="1382482" y="790219"/>
+                </a:lnTo>
+                <a:lnTo>
+                  <a:pt x="1371503" y="844599"/>
+                </a:lnTo>
+                <a:cubicBezTo>
+                  <a:pt x="1363379" y="863806"/>
+                  <a:pt x="1351623" y="881104"/>
+                  <a:pt x="1337096" y="895631"/>
+                </a:cubicBezTo>
+                <a:lnTo>
+                  <a:pt x="1297930" y="922037"/>
+                </a:lnTo>
+                <a:lnTo>
+                  <a:pt x="86190" y="922037"/>
+                </a:lnTo>
+                <a:lnTo>
+                  <a:pt x="47024" y="895631"/>
+                </a:lnTo>
+                <a:cubicBezTo>
+                  <a:pt x="17970" y="866577"/>
+                  <a:pt x="0" y="826440"/>
+                  <a:pt x="0" y="782106"/>
+                </a:cubicBezTo>
+                <a:lnTo>
+                  <a:pt x="0" y="139933"/>
+                </a:lnTo>
+                <a:cubicBezTo>
+                  <a:pt x="0" y="95599"/>
+                  <a:pt x="17970" y="55462"/>
+                  <a:pt x="47024" y="26409"/>
+                </a:cubicBezTo>
+                <a:close/>
+              </a:path>
+            </a:pathLst>
+          </a:custGeom>
+          <a:ln>
             <a:solidFill>
               <a:srgbClr val="2E54A1"/>
             </a:solidFill>
           </a:ln>
         </p:spPr>
-        <p:style>
-          <a:lnRef idx="2">
-            <a:schemeClr val="accent1">
-              <a:shade val="15000"/>
-            </a:schemeClr>
-          </a:lnRef>
-          <a:fillRef idx="1">
-            <a:schemeClr val="accent1"/>
-          </a:fillRef>
-          <a:effectRef idx="0">
-            <a:schemeClr val="accent1"/>
-          </a:effectRef>
-          <a:fontRef idx="minor">
-            <a:schemeClr val="lt1"/>
-          </a:fontRef>
-        </p:style>
-        <p:txBody>
-          <a:bodyPr rtlCol="0" anchor="ctr"/>
-          <a:lstStyle/>
-          <a:p>
-            <a:pPr algn="ctr"/>
-            <a:endParaRPr lang="zh-CN" altLang="en-US"/>
-          </a:p>
-        </p:txBody>
-      </p:sp>
-      <p:sp>
-        <p:nvSpPr>
-          <p:cNvPr id="483" name="矩形: 圆角 482">
-            <a:extLst>
-              <a:ext uri="{FF2B5EF4-FFF2-40B4-BE49-F238E27FC236}">
-                <a16:creationId xmlns:a16="http://schemas.microsoft.com/office/drawing/2014/main" id="{26AD66BF-3DF5-20D2-0997-8B14DF9D2F09}"/>
-              </a:ext>
-            </a:extLst>
-          </p:cNvPr>
-          <p:cNvSpPr/>
-          <p:nvPr/>
-        </p:nvSpPr>
-        <p:spPr>
-          <a:xfrm>
-            <a:off x="8604499" y="5802160"/>
-            <a:ext cx="1384120" cy="963269"/>
-          </a:xfrm>
-          <a:prstGeom prst="roundRect">
-            <a:avLst/>
-          </a:prstGeom>
-          <a:solidFill>
-            <a:schemeClr val="bg1"/>
-          </a:solidFill>
-          <a:ln w="38100">
-            <a:solidFill>
-              <a:srgbClr val="2E54A1"/>
-            </a:solidFill>
-          </a:ln>
-        </p:spPr>
-        <p:style>
-          <a:lnRef idx="2">
-            <a:schemeClr val="accent1">
-              <a:shade val="15000"/>
-            </a:schemeClr>
-          </a:lnRef>
-          <a:fillRef idx="1">
-            <a:schemeClr val="accent1"/>
-          </a:fillRef>
-          <a:effectRef idx="0">
-            <a:schemeClr val="accent1"/>
-          </a:effectRef>
-          <a:fontRef idx="minor">
-            <a:schemeClr val="lt1"/>
-          </a:fontRef>
-        </p:style>
-        <p:txBody>
-          <a:bodyPr rtlCol="0" anchor="ctr"/>
-          <a:lstStyle/>
-          <a:p>
-            <a:pPr algn="ctr"/>
-            <a:endParaRPr lang="zh-CN" altLang="en-US"/>
-          </a:p>
-        </p:txBody>
-      </p:sp>
+      </p:pic>
     </p:spTree>
   </p:cSld>
   <p:clrMapOvr>

--- a/军民融合/ppt/0B.pptx
+++ b/军民融合/ppt/0B.pptx
@@ -489,7 +489,7 @@
           <a:p>
             <a:fld id="{EAD68A4E-1AD5-4525-8412-8CB756C9DD23}" type="datetimeFigureOut">
               <a:rPr lang="zh-CN" altLang="en-US"/>
-              <a:t>2026/6/18</a:t>
+              <a:t>2026/6/22</a:t>
             </a:fld>
             <a:endParaRPr/>
           </a:p>
@@ -656,7 +656,7 @@
           <a:p>
             <a:fld id="{EAD68A4E-1AD5-4525-8412-8CB756C9DD23}" type="datetimeFigureOut">
               <a:rPr lang="zh-CN" altLang="en-US"/>
-              <a:t>2026/6/18</a:t>
+              <a:t>2026/6/22</a:t>
             </a:fld>
             <a:endParaRPr/>
           </a:p>
@@ -833,7 +833,7 @@
           <a:p>
             <a:fld id="{EAD68A4E-1AD5-4525-8412-8CB756C9DD23}" type="datetimeFigureOut">
               <a:rPr lang="zh-CN" altLang="en-US"/>
-              <a:t>2026/6/18</a:t>
+              <a:t>2026/6/22</a:t>
             </a:fld>
             <a:endParaRPr/>
           </a:p>
@@ -1000,7 +1000,7 @@
           <a:p>
             <a:fld id="{EAD68A4E-1AD5-4525-8412-8CB756C9DD23}" type="datetimeFigureOut">
               <a:rPr lang="zh-CN" altLang="en-US"/>
-              <a:t>2026/6/18</a:t>
+              <a:t>2026/6/22</a:t>
             </a:fld>
             <a:endParaRPr/>
           </a:p>
@@ -1241,7 +1241,7 @@
           <a:p>
             <a:fld id="{EAD68A4E-1AD5-4525-8412-8CB756C9DD23}" type="datetimeFigureOut">
               <a:rPr lang="zh-CN" altLang="en-US"/>
-              <a:t>2026/6/18</a:t>
+              <a:t>2026/6/22</a:t>
             </a:fld>
             <a:endParaRPr/>
           </a:p>
@@ -1474,7 +1474,7 @@
           <a:p>
             <a:fld id="{EAD68A4E-1AD5-4525-8412-8CB756C9DD23}" type="datetimeFigureOut">
               <a:rPr lang="zh-CN" altLang="en-US"/>
-              <a:t>2026/6/18</a:t>
+              <a:t>2026/6/22</a:t>
             </a:fld>
             <a:endParaRPr/>
           </a:p>
@@ -1844,7 +1844,7 @@
           <a:p>
             <a:fld id="{EAD68A4E-1AD5-4525-8412-8CB756C9DD23}" type="datetimeFigureOut">
               <a:rPr lang="zh-CN" altLang="en-US"/>
-              <a:t>2026/6/18</a:t>
+              <a:t>2026/6/22</a:t>
             </a:fld>
             <a:endParaRPr/>
           </a:p>
@@ -1955,7 +1955,7 @@
           <a:p>
             <a:fld id="{EAD68A4E-1AD5-4525-8412-8CB756C9DD23}" type="datetimeFigureOut">
               <a:rPr lang="zh-CN" altLang="en-US"/>
-              <a:t>2026/6/18</a:t>
+              <a:t>2026/6/22</a:t>
             </a:fld>
             <a:endParaRPr/>
           </a:p>
@@ -2045,7 +2045,7 @@
           <a:p>
             <a:fld id="{EAD68A4E-1AD5-4525-8412-8CB756C9DD23}" type="datetimeFigureOut">
               <a:rPr lang="zh-CN" altLang="en-US"/>
-              <a:t>2026/6/18</a:t>
+              <a:t>2026/6/22</a:t>
             </a:fld>
             <a:endParaRPr/>
           </a:p>
@@ -2330,7 +2330,7 @@
           <a:p>
             <a:fld id="{EAD68A4E-1AD5-4525-8412-8CB756C9DD23}" type="datetimeFigureOut">
               <a:rPr lang="zh-CN" altLang="en-US"/>
-              <a:t>2026/6/18</a:t>
+              <a:t>2026/6/22</a:t>
             </a:fld>
             <a:endParaRPr/>
           </a:p>
@@ -2578,7 +2578,7 @@
           <a:p>
             <a:fld id="{EAD68A4E-1AD5-4525-8412-8CB756C9DD23}" type="datetimeFigureOut">
               <a:rPr lang="zh-CN" altLang="en-US"/>
-              <a:t>2026/6/18</a:t>
+              <a:t>2026/6/22</a:t>
             </a:fld>
             <a:endParaRPr/>
           </a:p>
@@ -2789,7 +2789,7 @@
           <a:p>
             <a:fld id="{EAD68A4E-1AD5-4525-8412-8CB756C9DD23}" type="datetimeFigureOut">
               <a:rPr lang="zh-CN" altLang="en-US"/>
-              <a:t>2026/6/18</a:t>
+              <a:t>2026/6/22</a:t>
             </a:fld>
             <a:endParaRPr/>
           </a:p>
@@ -4797,102 +4797,6 @@
       </p:sp>
       <p:sp>
         <p:nvSpPr>
-          <p:cNvPr id="215" name="文本框 214">
-            <a:extLst>
-              <a:ext uri="{FF2B5EF4-FFF2-40B4-BE49-F238E27FC236}">
-                <a16:creationId xmlns:a16="http://schemas.microsoft.com/office/drawing/2014/main" id="{7C315841-99BE-D42F-F58F-9A65E94097BC}"/>
-              </a:ext>
-            </a:extLst>
-          </p:cNvPr>
-          <p:cNvSpPr txBox="1"/>
-          <p:nvPr/>
-        </p:nvSpPr>
-        <p:spPr>
-          <a:xfrm>
-            <a:off x="2535701" y="6095744"/>
-            <a:ext cx="3361963" cy="360099"/>
-          </a:xfrm>
-          <a:prstGeom prst="rect">
-            <a:avLst/>
-          </a:prstGeom>
-          <a:solidFill>
-            <a:schemeClr val="bg1"/>
-          </a:solidFill>
-        </p:spPr>
-        <p:txBody>
-          <a:bodyPr wrap="square" rtlCol="0">
-            <a:spAutoFit/>
-          </a:bodyPr>
-          <a:lstStyle/>
-          <a:p>
-            <a:pPr algn="ctr"/>
-            <a:r>
-              <a:rPr lang="zh-CN" altLang="en-US" sz="1740" b="1" dirty="0">
-                <a:solidFill>
-                  <a:srgbClr val="2E54A1"/>
-                </a:solidFill>
-                <a:latin typeface="微软雅黑" panose="020B0503020204020204" pitchFamily="34" charset="-122"/>
-                <a:ea typeface="微软雅黑" panose="020B0503020204020204" pitchFamily="34" charset="-122"/>
-                <a:sym typeface="+mn-ea"/>
-              </a:rPr>
-              <a:t>目标</a:t>
-            </a:r>
-            <a:r>
-              <a:rPr lang="en-US" altLang="zh-CN" sz="1200" b="1" dirty="0">
-                <a:solidFill>
-                  <a:srgbClr val="2E54A1"/>
-                </a:solidFill>
-                <a:latin typeface="微软雅黑" panose="020B0503020204020204" pitchFamily="34" charset="-122"/>
-                <a:ea typeface="微软雅黑" panose="020B0503020204020204" pitchFamily="34" charset="-122"/>
-                <a:sym typeface="+mn-ea"/>
-              </a:rPr>
-              <a:t>———</a:t>
-            </a:r>
-            <a:r>
-              <a:rPr lang="zh-CN" altLang="en-US" sz="1200" b="1" dirty="0">
-                <a:solidFill>
-                  <a:srgbClr val="2E54A1"/>
-                </a:solidFill>
-                <a:latin typeface="微软雅黑" panose="020B0503020204020204" pitchFamily="34" charset="-122"/>
-                <a:ea typeface="微软雅黑" panose="020B0503020204020204" pitchFamily="34" charset="-122"/>
-                <a:sym typeface="+mn-ea"/>
-              </a:rPr>
-              <a:t>数据管理底座</a:t>
-            </a:r>
-            <a:r>
-              <a:rPr lang="en-US" altLang="zh-CN" sz="1200" b="1" dirty="0">
-                <a:solidFill>
-                  <a:srgbClr val="2E54A1"/>
-                </a:solidFill>
-                <a:latin typeface="微软雅黑" panose="020B0503020204020204" pitchFamily="34" charset="-122"/>
-                <a:ea typeface="微软雅黑" panose="020B0503020204020204" pitchFamily="34" charset="-122"/>
-                <a:sym typeface="+mn-ea"/>
-              </a:rPr>
-              <a:t>———</a:t>
-            </a:r>
-            <a:r>
-              <a:rPr lang="zh-CN" altLang="en-US" sz="1740" b="1" dirty="0">
-                <a:solidFill>
-                  <a:srgbClr val="2E54A1"/>
-                </a:solidFill>
-                <a:latin typeface="微软雅黑" panose="020B0503020204020204" pitchFamily="34" charset="-122"/>
-                <a:ea typeface="微软雅黑" panose="020B0503020204020204" pitchFamily="34" charset="-122"/>
-                <a:sym typeface="+mn-ea"/>
-              </a:rPr>
-              <a:t>目标</a:t>
-            </a:r>
-            <a:endParaRPr lang="zh-CN" altLang="en-US" sz="1740" b="1" dirty="0">
-              <a:solidFill>
-                <a:srgbClr val="2E54A1"/>
-              </a:solidFill>
-              <a:latin typeface="微软雅黑" panose="020B0503020204020204" pitchFamily="34" charset="-122"/>
-              <a:ea typeface="微软雅黑" panose="020B0503020204020204" pitchFamily="34" charset="-122"/>
-            </a:endParaRPr>
-          </a:p>
-        </p:txBody>
-      </p:sp>
-      <p:sp>
-        <p:nvSpPr>
           <p:cNvPr id="192" name="文本框 191">
             <a:extLst>
               <a:ext uri="{FF2B5EF4-FFF2-40B4-BE49-F238E27FC236}">
@@ -8886,6 +8790,180 @@
           </a:ln>
         </p:spPr>
       </p:pic>
+      <p:sp>
+        <p:nvSpPr>
+          <p:cNvPr id="22" name="箭头: 燕尾形 1202">
+            <a:extLst>
+              <a:ext uri="{FF2B5EF4-FFF2-40B4-BE49-F238E27FC236}">
+                <a16:creationId xmlns:a16="http://schemas.microsoft.com/office/drawing/2014/main" id="{702E30C6-65BD-E545-DC04-C2727B184E41}"/>
+              </a:ext>
+            </a:extLst>
+          </p:cNvPr>
+          <p:cNvSpPr/>
+          <p:nvPr/>
+        </p:nvSpPr>
+        <p:spPr>
+          <a:xfrm rot="10800000" flipH="1">
+            <a:off x="3694175" y="6076929"/>
+            <a:ext cx="408305" cy="324485"/>
+          </a:xfrm>
+          <a:prstGeom prst="notchedRightArrow">
+            <a:avLst/>
+          </a:prstGeom>
+          <a:gradFill>
+            <a:gsLst>
+              <a:gs pos="100000">
+                <a:srgbClr val="2E54A1"/>
+              </a:gs>
+              <a:gs pos="5000">
+                <a:srgbClr val="2E54A1">
+                  <a:alpha val="0"/>
+                </a:srgbClr>
+              </a:gs>
+            </a:gsLst>
+            <a:lin ang="0" scaled="0"/>
+          </a:gradFill>
+          <a:ln>
+            <a:noFill/>
+          </a:ln>
+        </p:spPr>
+        <p:style>
+          <a:lnRef idx="2">
+            <a:schemeClr val="accent1">
+              <a:shade val="15000"/>
+            </a:schemeClr>
+          </a:lnRef>
+          <a:fillRef idx="1">
+            <a:schemeClr val="accent1"/>
+          </a:fillRef>
+          <a:effectRef idx="0">
+            <a:schemeClr val="accent1"/>
+          </a:effectRef>
+          <a:fontRef idx="minor">
+            <a:schemeClr val="lt1"/>
+          </a:fontRef>
+        </p:style>
+        <p:txBody>
+          <a:bodyPr rtlCol="0" anchor="ctr"/>
+          <a:lstStyle/>
+          <a:p>
+            <a:pPr marL="0" marR="0" lvl="0" indent="0" algn="ctr" defTabSz="914400" rtl="0" eaLnBrk="1" fontAlgn="auto" latinLnBrk="0" hangingPunct="1">
+              <a:lnSpc>
+                <a:spcPct val="100000"/>
+              </a:lnSpc>
+              <a:spcBef>
+                <a:spcPts val="0"/>
+              </a:spcBef>
+              <a:spcAft>
+                <a:spcPts val="0"/>
+              </a:spcAft>
+              <a:buClrTx/>
+              <a:buSzTx/>
+              <a:buFontTx/>
+              <a:buNone/>
+              <a:defRPr/>
+            </a:pPr>
+            <a:endParaRPr kumimoji="0" lang="zh-CN" altLang="en-US" sz="2235" b="0" i="0" u="none" strike="noStrike" kern="1200" cap="none" spc="0" normalizeH="0" baseline="0" noProof="0">
+              <a:ln>
+                <a:noFill/>
+              </a:ln>
+              <a:solidFill>
+                <a:prstClr val="white"/>
+              </a:solidFill>
+              <a:effectLst/>
+              <a:uLnTx/>
+              <a:uFillTx/>
+              <a:latin typeface="等线" panose="02010600030101010101" charset="-122"/>
+              <a:ea typeface="等线" panose="02010600030101010101" charset="-122"/>
+              <a:cs typeface="+mn-cs"/>
+            </a:endParaRPr>
+          </a:p>
+        </p:txBody>
+      </p:sp>
+      <p:sp>
+        <p:nvSpPr>
+          <p:cNvPr id="27" name="文本框 26">
+            <a:extLst>
+              <a:ext uri="{FF2B5EF4-FFF2-40B4-BE49-F238E27FC236}">
+                <a16:creationId xmlns:a16="http://schemas.microsoft.com/office/drawing/2014/main" id="{8D3EF06B-8E9C-26A0-1E9B-3385B3EF0CB3}"/>
+              </a:ext>
+            </a:extLst>
+          </p:cNvPr>
+          <p:cNvSpPr txBox="1"/>
+          <p:nvPr/>
+        </p:nvSpPr>
+        <p:spPr>
+          <a:xfrm>
+            <a:off x="2643529" y="6075342"/>
+            <a:ext cx="1341806" cy="360099"/>
+          </a:xfrm>
+          <a:prstGeom prst="rect">
+            <a:avLst/>
+          </a:prstGeom>
+          <a:noFill/>
+        </p:spPr>
+        <p:txBody>
+          <a:bodyPr wrap="square" rtlCol="0">
+            <a:spAutoFit/>
+          </a:bodyPr>
+          <a:lstStyle/>
+          <a:p>
+            <a:pPr algn="ctr"/>
+            <a:r>
+              <a:rPr lang="zh-CN" altLang="en-US" sz="1740" b="1" dirty="0">
+                <a:solidFill>
+                  <a:srgbClr val="2E54A1"/>
+                </a:solidFill>
+                <a:latin typeface="微软雅黑" panose="020B0503020204020204" pitchFamily="34" charset="-122"/>
+                <a:ea typeface="微软雅黑" panose="020B0503020204020204" pitchFamily="34" charset="-122"/>
+              </a:rPr>
+              <a:t>数据</a:t>
+            </a:r>
+          </a:p>
+        </p:txBody>
+      </p:sp>
+      <p:sp>
+        <p:nvSpPr>
+          <p:cNvPr id="28" name="文本框 27">
+            <a:extLst>
+              <a:ext uri="{FF2B5EF4-FFF2-40B4-BE49-F238E27FC236}">
+                <a16:creationId xmlns:a16="http://schemas.microsoft.com/office/drawing/2014/main" id="{16C0167C-A3AD-86FF-C06A-8E812839C915}"/>
+              </a:ext>
+            </a:extLst>
+          </p:cNvPr>
+          <p:cNvSpPr txBox="1"/>
+          <p:nvPr/>
+        </p:nvSpPr>
+        <p:spPr>
+          <a:xfrm>
+            <a:off x="4370104" y="6102148"/>
+            <a:ext cx="1341806" cy="360099"/>
+          </a:xfrm>
+          <a:prstGeom prst="rect">
+            <a:avLst/>
+          </a:prstGeom>
+          <a:noFill/>
+        </p:spPr>
+        <p:txBody>
+          <a:bodyPr wrap="square" rtlCol="0">
+            <a:spAutoFit/>
+          </a:bodyPr>
+          <a:lstStyle/>
+          <a:p>
+            <a:pPr algn="ctr"/>
+            <a:r>
+              <a:rPr lang="zh-CN" altLang="en-US" sz="1740" b="1" dirty="0">
+                <a:solidFill>
+                  <a:srgbClr val="2E54A1"/>
+                </a:solidFill>
+                <a:latin typeface="微软雅黑" panose="020B0503020204020204" pitchFamily="34" charset="-122"/>
+                <a:ea typeface="微软雅黑" panose="020B0503020204020204" pitchFamily="34" charset="-122"/>
+              </a:rPr>
+              <a:t>目标</a:t>
+            </a:r>
+          </a:p>
+        </p:txBody>
+      </p:sp>
     </p:spTree>
   </p:cSld>
   <p:clrMapOvr>

--- a/军民融合/ppt/0B.pptx
+++ b/军民融合/ppt/0B.pptx
@@ -3269,8 +3269,8 @@
         </p:nvSpPr>
         <p:spPr>
           <a:xfrm flipH="1">
-            <a:off x="5368045" y="3894785"/>
-            <a:ext cx="2171881" cy="2745105"/>
+            <a:off x="5368044" y="3894786"/>
+            <a:ext cx="2171881" cy="2302736"/>
           </a:xfrm>
           <a:prstGeom prst="roundRect">
             <a:avLst>
@@ -4098,8 +4098,8 @@
         </p:nvSpPr>
         <p:spPr>
           <a:xfrm flipH="1">
-            <a:off x="749690" y="3894785"/>
-            <a:ext cx="2171881" cy="2745105"/>
+            <a:off x="749689" y="3894786"/>
+            <a:ext cx="2171881" cy="2302736"/>
           </a:xfrm>
           <a:prstGeom prst="roundRect">
             <a:avLst>
@@ -4179,25 +4179,7 @@
                 <a:latin typeface="微软雅黑" panose="020B0503020204020204" pitchFamily="34" charset="-122"/>
                 <a:ea typeface="微软雅黑" panose="020B0503020204020204" pitchFamily="34" charset="-122"/>
               </a:rPr>
-              <a:t>海杂波干扰下微弱电磁频谱信号</a:t>
-            </a:r>
-            <a:endParaRPr lang="en-US" altLang="zh-CN" sz="1400" b="1" dirty="0">
-              <a:latin typeface="微软雅黑" panose="020B0503020204020204" pitchFamily="34" charset="-122"/>
-              <a:ea typeface="微软雅黑" panose="020B0503020204020204" pitchFamily="34" charset="-122"/>
-            </a:endParaRPr>
-          </a:p>
-          <a:p>
-            <a:pPr algn="ctr">
-              <a:lnSpc>
-                <a:spcPct val="100000"/>
-              </a:lnSpc>
-            </a:pPr>
-            <a:r>
-              <a:rPr lang="zh-CN" altLang="en-US" sz="1400" b="1" dirty="0">
-                <a:latin typeface="微软雅黑" panose="020B0503020204020204" pitchFamily="34" charset="-122"/>
-                <a:ea typeface="微软雅黑" panose="020B0503020204020204" pitchFamily="34" charset="-122"/>
-              </a:rPr>
-              <a:t>传播规律分析与提取</a:t>
+              <a:t>海杂波干扰下微弱电磁频谱信号传播规律分析与提取</a:t>
             </a:r>
           </a:p>
         </p:txBody>
@@ -4216,8 +4198,8 @@
         </p:nvSpPr>
         <p:spPr>
           <a:xfrm rot="10800000" flipH="1">
-            <a:off x="2115526" y="6103632"/>
-            <a:ext cx="408305" cy="324485"/>
+            <a:off x="1835033" y="6343609"/>
+            <a:ext cx="1166532" cy="324485"/>
           </a:xfrm>
           <a:prstGeom prst="notchedRightArrow">
             <a:avLst/>
@@ -4306,7 +4288,7 @@
         </p:nvSpPr>
         <p:spPr>
           <a:xfrm>
-            <a:off x="1064880" y="6102045"/>
+            <a:off x="931787" y="6351568"/>
             <a:ext cx="1341806" cy="360099"/>
           </a:xfrm>
           <a:prstGeom prst="rect">
@@ -4672,7 +4654,7 @@
                 <a:latin typeface="微软雅黑" panose="020B0503020204020204" pitchFamily="34" charset="-122"/>
                 <a:ea typeface="微软雅黑" panose="020B0503020204020204" pitchFamily="34" charset="-122"/>
               </a:rPr>
-              <a:t>联合表征</a:t>
+              <a:t>表征提取</a:t>
             </a:r>
           </a:p>
         </p:txBody>
@@ -4691,8 +4673,8 @@
         </p:nvSpPr>
         <p:spPr>
           <a:xfrm flipH="1">
-            <a:off x="3058868" y="3894785"/>
-            <a:ext cx="2171881" cy="2745105"/>
+            <a:off x="3058867" y="3894786"/>
+            <a:ext cx="2171881" cy="2302736"/>
           </a:xfrm>
           <a:prstGeom prst="roundRect">
             <a:avLst>
@@ -4772,25 +4754,7 @@
                 <a:latin typeface="微软雅黑" panose="020B0503020204020204" pitchFamily="34" charset="-122"/>
                 <a:ea typeface="微软雅黑" panose="020B0503020204020204" pitchFamily="34" charset="-122"/>
               </a:rPr>
-              <a:t>有限算力端侧频谱数据的</a:t>
-            </a:r>
-            <a:endParaRPr lang="en-US" altLang="zh-CN" sz="1400" b="1" dirty="0">
-              <a:latin typeface="微软雅黑" panose="020B0503020204020204" pitchFamily="34" charset="-122"/>
-              <a:ea typeface="微软雅黑" panose="020B0503020204020204" pitchFamily="34" charset="-122"/>
-            </a:endParaRPr>
-          </a:p>
-          <a:p>
-            <a:pPr algn="ctr">
-              <a:lnSpc>
-                <a:spcPct val="100000"/>
-              </a:lnSpc>
-            </a:pPr>
-            <a:r>
-              <a:rPr lang="zh-CN" altLang="en-US" sz="1400" b="1" dirty="0">
-                <a:latin typeface="微软雅黑" panose="020B0503020204020204" pitchFamily="34" charset="-122"/>
-                <a:ea typeface="微软雅黑" panose="020B0503020204020204" pitchFamily="34" charset="-122"/>
-              </a:rPr>
-              <a:t>可信管理和轻量存储方法</a:t>
+              <a:t>有限算力端侧频谱数据的轻量存储和可信管理方法</a:t>
             </a:r>
           </a:p>
         </p:txBody>
@@ -4833,25 +4797,7 @@
                 <a:latin typeface="微软雅黑" panose="020B0503020204020204" pitchFamily="34" charset="-122"/>
                 <a:ea typeface="微软雅黑" panose="020B0503020204020204" pitchFamily="34" charset="-122"/>
               </a:rPr>
-              <a:t>面向海域自主侦测任务的</a:t>
-            </a:r>
-            <a:endParaRPr lang="en-US" altLang="zh-CN" sz="1400" b="1" dirty="0">
-              <a:latin typeface="微软雅黑" panose="020B0503020204020204" pitchFamily="34" charset="-122"/>
-              <a:ea typeface="微软雅黑" panose="020B0503020204020204" pitchFamily="34" charset="-122"/>
-            </a:endParaRPr>
-          </a:p>
-          <a:p>
-            <a:pPr algn="ctr">
-              <a:lnSpc>
-                <a:spcPct val="100000"/>
-              </a:lnSpc>
-            </a:pPr>
-            <a:r>
-              <a:rPr lang="zh-CN" altLang="en-US" sz="1400" b="1" dirty="0">
-                <a:latin typeface="微软雅黑" panose="020B0503020204020204" pitchFamily="34" charset="-122"/>
-                <a:ea typeface="微软雅黑" panose="020B0503020204020204" pitchFamily="34" charset="-122"/>
-              </a:rPr>
-              <a:t>知识驱动频谱智能处理方法</a:t>
+              <a:t>基于频谱知识图谱的轻量化目标识别与可信协同决策</a:t>
             </a:r>
           </a:p>
         </p:txBody>
@@ -4870,7 +4816,7 @@
         </p:nvSpPr>
         <p:spPr>
           <a:xfrm>
-            <a:off x="6115860" y="6035613"/>
+            <a:off x="6214517" y="6275018"/>
             <a:ext cx="1722388" cy="461665"/>
           </a:xfrm>
           <a:prstGeom prst="rect">
@@ -4895,17 +4841,6 @@
                 <a:sym typeface="+mn-ea"/>
               </a:rPr>
               <a:t>态势</a:t>
-            </a:r>
-            <a:r>
-              <a:rPr lang="zh-CN" altLang="en-US" sz="1400" b="1" dirty="0">
-                <a:solidFill>
-                  <a:srgbClr val="2E54A1"/>
-                </a:solidFill>
-                <a:latin typeface="微软雅黑" panose="020B0503020204020204" pitchFamily="34" charset="-122"/>
-                <a:ea typeface="微软雅黑" panose="020B0503020204020204" pitchFamily="34" charset="-122"/>
-                <a:sym typeface="+mn-ea"/>
-              </a:rPr>
-              <a:t>（决策）</a:t>
             </a:r>
             <a:endParaRPr lang="zh-CN" altLang="en-US" sz="2400" b="1" dirty="0">
               <a:solidFill>
@@ -5345,96 +5280,6 @@
               <a:rPr lang="zh-CN" altLang="en-US" dirty="0"/>
               <a:t>原型系统部署</a:t>
             </a:r>
-          </a:p>
-        </p:txBody>
-      </p:sp>
-      <p:sp>
-        <p:nvSpPr>
-          <p:cNvPr id="329" name="箭头: 燕尾形 1202">
-            <a:extLst>
-              <a:ext uri="{FF2B5EF4-FFF2-40B4-BE49-F238E27FC236}">
-                <a16:creationId xmlns:a16="http://schemas.microsoft.com/office/drawing/2014/main" id="{8884B186-D89D-3A9E-0E10-EA2A7A9CCE81}"/>
-              </a:ext>
-            </a:extLst>
-          </p:cNvPr>
-          <p:cNvSpPr/>
-          <p:nvPr/>
-        </p:nvSpPr>
-        <p:spPr>
-          <a:xfrm rot="10800000" flipH="1">
-            <a:off x="5686707" y="6035613"/>
-            <a:ext cx="600499" cy="492962"/>
-          </a:xfrm>
-          <a:prstGeom prst="notchedRightArrow">
-            <a:avLst/>
-          </a:prstGeom>
-          <a:gradFill>
-            <a:gsLst>
-              <a:gs pos="100000">
-                <a:srgbClr val="2E54A1"/>
-              </a:gs>
-              <a:gs pos="5000">
-                <a:srgbClr val="2E54A1">
-                  <a:alpha val="0"/>
-                </a:srgbClr>
-              </a:gs>
-            </a:gsLst>
-            <a:lin ang="0" scaled="0"/>
-          </a:gradFill>
-          <a:ln>
-            <a:noFill/>
-          </a:ln>
-        </p:spPr>
-        <p:style>
-          <a:lnRef idx="2">
-            <a:schemeClr val="accent1">
-              <a:shade val="15000"/>
-            </a:schemeClr>
-          </a:lnRef>
-          <a:fillRef idx="1">
-            <a:schemeClr val="accent1"/>
-          </a:fillRef>
-          <a:effectRef idx="0">
-            <a:schemeClr val="accent1"/>
-          </a:effectRef>
-          <a:fontRef idx="minor">
-            <a:schemeClr val="lt1"/>
-          </a:fontRef>
-        </p:style>
-        <p:txBody>
-          <a:bodyPr rtlCol="0" anchor="ctr"/>
-          <a:lstStyle/>
-          <a:p>
-            <a:pPr marL="0" marR="0" lvl="0" indent="0" algn="ctr" defTabSz="914400" rtl="0" eaLnBrk="1" fontAlgn="auto" latinLnBrk="0" hangingPunct="1">
-              <a:lnSpc>
-                <a:spcPct val="100000"/>
-              </a:lnSpc>
-              <a:spcBef>
-                <a:spcPts val="0"/>
-              </a:spcBef>
-              <a:spcAft>
-                <a:spcPts val="0"/>
-              </a:spcAft>
-              <a:buClrTx/>
-              <a:buSzTx/>
-              <a:buFontTx/>
-              <a:buNone/>
-              <a:defRPr/>
-            </a:pPr>
-            <a:endParaRPr kumimoji="0" lang="zh-CN" altLang="en-US" sz="2235" b="0" i="0" u="none" strike="noStrike" kern="1200" cap="none" spc="0" normalizeH="0" baseline="0" noProof="0">
-              <a:ln>
-                <a:noFill/>
-              </a:ln>
-              <a:solidFill>
-                <a:prstClr val="white"/>
-              </a:solidFill>
-              <a:effectLst/>
-              <a:uLnTx/>
-              <a:uFillTx/>
-              <a:latin typeface="等线" panose="02010600030101010101" charset="-122"/>
-              <a:ea typeface="等线" panose="02010600030101010101" charset="-122"/>
-              <a:cs typeface="+mn-cs"/>
-            </a:endParaRPr>
           </a:p>
         </p:txBody>
       </p:sp>
@@ -6962,7 +6807,23 @@
                 <a:ea typeface="微软雅黑" panose="020B0503020204020204" pitchFamily="34" charset="-122"/>
                 <a:sym typeface="+mn-ea"/>
               </a:rPr>
-              <a:t>事件价值评估</a:t>
+              <a:t>频谱数据</a:t>
+            </a:r>
+            <a:endParaRPr lang="en-US" altLang="zh-CN" sz="1100" b="1" dirty="0">
+              <a:latin typeface="微软雅黑" panose="020B0503020204020204" pitchFamily="34" charset="-122"/>
+              <a:ea typeface="微软雅黑" panose="020B0503020204020204" pitchFamily="34" charset="-122"/>
+              <a:sym typeface="+mn-ea"/>
+            </a:endParaRPr>
+          </a:p>
+          <a:p>
+            <a:pPr algn="ctr"/>
+            <a:r>
+              <a:rPr lang="zh-CN" altLang="en-US" sz="1100" b="1" dirty="0">
+                <a:latin typeface="微软雅黑" panose="020B0503020204020204" pitchFamily="34" charset="-122"/>
+                <a:ea typeface="微软雅黑" panose="020B0503020204020204" pitchFamily="34" charset="-122"/>
+                <a:sym typeface="+mn-ea"/>
+              </a:rPr>
+              <a:t>价值评估</a:t>
             </a:r>
             <a:endParaRPr lang="zh-CN" altLang="en-US" sz="1100" b="1" dirty="0">
               <a:latin typeface="微软雅黑" panose="020B0503020204020204" pitchFamily="34" charset="-122"/>
@@ -7005,7 +6866,21 @@
                 <a:latin typeface="微软雅黑" panose="020B0503020204020204" pitchFamily="34" charset="-122"/>
                 <a:ea typeface="微软雅黑" panose="020B0503020204020204" pitchFamily="34" charset="-122"/>
               </a:rPr>
-              <a:t>表征压缩存储</a:t>
+              <a:t>向量库</a:t>
+            </a:r>
+            <a:endParaRPr lang="en-US" altLang="zh-CN" sz="1100" b="1" dirty="0">
+              <a:latin typeface="微软雅黑" panose="020B0503020204020204" pitchFamily="34" charset="-122"/>
+              <a:ea typeface="微软雅黑" panose="020B0503020204020204" pitchFamily="34" charset="-122"/>
+            </a:endParaRPr>
+          </a:p>
+          <a:p>
+            <a:pPr algn="ctr"/>
+            <a:r>
+              <a:rPr lang="zh-CN" altLang="en-US" sz="1100" b="1" dirty="0">
+                <a:latin typeface="微软雅黑" panose="020B0503020204020204" pitchFamily="34" charset="-122"/>
+                <a:ea typeface="微软雅黑" panose="020B0503020204020204" pitchFamily="34" charset="-122"/>
+              </a:rPr>
+              <a:t>存储压缩</a:t>
             </a:r>
           </a:p>
         </p:txBody>
@@ -7044,7 +6919,21 @@
                 <a:latin typeface="微软雅黑" panose="020B0503020204020204" pitchFamily="34" charset="-122"/>
                 <a:ea typeface="微软雅黑" panose="020B0503020204020204" pitchFamily="34" charset="-122"/>
               </a:rPr>
-              <a:t>链上链下存证</a:t>
+              <a:t>频谱数据</a:t>
+            </a:r>
+            <a:endParaRPr lang="en-US" altLang="zh-CN" sz="1100" b="1" dirty="0">
+              <a:latin typeface="微软雅黑" panose="020B0503020204020204" pitchFamily="34" charset="-122"/>
+              <a:ea typeface="微软雅黑" panose="020B0503020204020204" pitchFamily="34" charset="-122"/>
+            </a:endParaRPr>
+          </a:p>
+          <a:p>
+            <a:pPr algn="ctr"/>
+            <a:r>
+              <a:rPr lang="zh-CN" altLang="en-US" sz="1100" b="1" dirty="0">
+                <a:latin typeface="微软雅黑" panose="020B0503020204020204" pitchFamily="34" charset="-122"/>
+                <a:ea typeface="微软雅黑" panose="020B0503020204020204" pitchFamily="34" charset="-122"/>
+              </a:rPr>
+              <a:t>可信管理</a:t>
             </a:r>
           </a:p>
         </p:txBody>
@@ -7749,7 +7638,7 @@
                 <a:latin typeface="微软雅黑" panose="020B0503020204020204" pitchFamily="34" charset="-122"/>
                 <a:ea typeface="微软雅黑" panose="020B0503020204020204" pitchFamily="34" charset="-122"/>
               </a:rPr>
-              <a:t>多载体</a:t>
+              <a:t>轻量</a:t>
             </a:r>
             <a:endParaRPr lang="en-US" altLang="zh-CN" sz="1100" b="1" dirty="0">
               <a:latin typeface="微软雅黑" panose="020B0503020204020204" pitchFamily="34" charset="-122"/>
@@ -7763,7 +7652,7 @@
                 <a:latin typeface="微软雅黑" panose="020B0503020204020204" pitchFamily="34" charset="-122"/>
                 <a:ea typeface="微软雅黑" panose="020B0503020204020204" pitchFamily="34" charset="-122"/>
               </a:rPr>
-              <a:t>分布式协同</a:t>
+              <a:t>可信协同</a:t>
             </a:r>
           </a:p>
         </p:txBody>
@@ -8792,10 +8681,94 @@
       </p:pic>
       <p:sp>
         <p:nvSpPr>
-          <p:cNvPr id="22" name="箭头: 燕尾形 1202">
+          <p:cNvPr id="27" name="文本框 26">
             <a:extLst>
               <a:ext uri="{FF2B5EF4-FFF2-40B4-BE49-F238E27FC236}">
-                <a16:creationId xmlns:a16="http://schemas.microsoft.com/office/drawing/2014/main" id="{702E30C6-65BD-E545-DC04-C2727B184E41}"/>
+                <a16:creationId xmlns:a16="http://schemas.microsoft.com/office/drawing/2014/main" id="{8D3EF06B-8E9C-26A0-1E9B-3385B3EF0CB3}"/>
+              </a:ext>
+            </a:extLst>
+          </p:cNvPr>
+          <p:cNvSpPr txBox="1"/>
+          <p:nvPr/>
+        </p:nvSpPr>
+        <p:spPr>
+          <a:xfrm>
+            <a:off x="2632694" y="6346694"/>
+            <a:ext cx="1341806" cy="360099"/>
+          </a:xfrm>
+          <a:prstGeom prst="rect">
+            <a:avLst/>
+          </a:prstGeom>
+          <a:noFill/>
+        </p:spPr>
+        <p:txBody>
+          <a:bodyPr wrap="square" rtlCol="0">
+            <a:spAutoFit/>
+          </a:bodyPr>
+          <a:lstStyle/>
+          <a:p>
+            <a:pPr algn="ctr"/>
+            <a:r>
+              <a:rPr lang="zh-CN" altLang="en-US" sz="1740" b="1" dirty="0">
+                <a:solidFill>
+                  <a:srgbClr val="2E54A1"/>
+                </a:solidFill>
+                <a:latin typeface="微软雅黑" panose="020B0503020204020204" pitchFamily="34" charset="-122"/>
+                <a:ea typeface="微软雅黑" panose="020B0503020204020204" pitchFamily="34" charset="-122"/>
+              </a:rPr>
+              <a:t>数据</a:t>
+            </a:r>
+          </a:p>
+        </p:txBody>
+      </p:sp>
+      <p:sp>
+        <p:nvSpPr>
+          <p:cNvPr id="28" name="文本框 27">
+            <a:extLst>
+              <a:ext uri="{FF2B5EF4-FFF2-40B4-BE49-F238E27FC236}">
+                <a16:creationId xmlns:a16="http://schemas.microsoft.com/office/drawing/2014/main" id="{16C0167C-A3AD-86FF-C06A-8E812839C915}"/>
+              </a:ext>
+            </a:extLst>
+          </p:cNvPr>
+          <p:cNvSpPr txBox="1"/>
+          <p:nvPr/>
+        </p:nvSpPr>
+        <p:spPr>
+          <a:xfrm>
+            <a:off x="4545478" y="6329417"/>
+            <a:ext cx="1341806" cy="360099"/>
+          </a:xfrm>
+          <a:prstGeom prst="rect">
+            <a:avLst/>
+          </a:prstGeom>
+          <a:noFill/>
+        </p:spPr>
+        <p:txBody>
+          <a:bodyPr wrap="square" rtlCol="0">
+            <a:spAutoFit/>
+          </a:bodyPr>
+          <a:lstStyle/>
+          <a:p>
+            <a:pPr algn="ctr"/>
+            <a:r>
+              <a:rPr lang="zh-CN" altLang="en-US" sz="1740" b="1" dirty="0">
+                <a:solidFill>
+                  <a:srgbClr val="2E54A1"/>
+                </a:solidFill>
+                <a:latin typeface="微软雅黑" panose="020B0503020204020204" pitchFamily="34" charset="-122"/>
+                <a:ea typeface="微软雅黑" panose="020B0503020204020204" pitchFamily="34" charset="-122"/>
+              </a:rPr>
+              <a:t>目标</a:t>
+            </a:r>
+          </a:p>
+        </p:txBody>
+      </p:sp>
+      <p:sp>
+        <p:nvSpPr>
+          <p:cNvPr id="29" name="箭头: 燕尾形 1202">
+            <a:extLst>
+              <a:ext uri="{FF2B5EF4-FFF2-40B4-BE49-F238E27FC236}">
+                <a16:creationId xmlns:a16="http://schemas.microsoft.com/office/drawing/2014/main" id="{BBEA23A3-ADCF-19C5-01C8-4563FC87A00A}"/>
               </a:ext>
             </a:extLst>
           </p:cNvPr>
@@ -8804,8 +8777,8 @@
         </p:nvSpPr>
         <p:spPr>
           <a:xfrm rot="10800000" flipH="1">
-            <a:off x="3694175" y="6076929"/>
-            <a:ext cx="408305" cy="324485"/>
+            <a:off x="3535941" y="6351568"/>
+            <a:ext cx="1395863" cy="324485"/>
           </a:xfrm>
           <a:prstGeom prst="notchedRightArrow">
             <a:avLst/>
@@ -8882,85 +8855,91 @@
       </p:sp>
       <p:sp>
         <p:nvSpPr>
-          <p:cNvPr id="27" name="文本框 26">
+          <p:cNvPr id="30" name="箭头: 燕尾形 1202">
             <a:extLst>
               <a:ext uri="{FF2B5EF4-FFF2-40B4-BE49-F238E27FC236}">
-                <a16:creationId xmlns:a16="http://schemas.microsoft.com/office/drawing/2014/main" id="{8D3EF06B-8E9C-26A0-1E9B-3385B3EF0CB3}"/>
+                <a16:creationId xmlns:a16="http://schemas.microsoft.com/office/drawing/2014/main" id="{F2241BF9-6530-8812-11D8-7721B06A341C}"/>
               </a:ext>
             </a:extLst>
           </p:cNvPr>
-          <p:cNvSpPr txBox="1"/>
+          <p:cNvSpPr/>
           <p:nvPr/>
         </p:nvSpPr>
         <p:spPr>
-          <a:xfrm>
-            <a:off x="2643529" y="6075342"/>
-            <a:ext cx="1341806" cy="360099"/>
-          </a:xfrm>
-          <a:prstGeom prst="rect">
+          <a:xfrm rot="10800000" flipH="1">
+            <a:off x="5396492" y="6210983"/>
+            <a:ext cx="1312291" cy="605653"/>
+          </a:xfrm>
+          <a:prstGeom prst="notchedRightArrow">
             <a:avLst/>
           </a:prstGeom>
-          <a:noFill/>
+          <a:gradFill>
+            <a:gsLst>
+              <a:gs pos="100000">
+                <a:srgbClr val="2E54A1"/>
+              </a:gs>
+              <a:gs pos="5000">
+                <a:srgbClr val="2E54A1">
+                  <a:alpha val="0"/>
+                </a:srgbClr>
+              </a:gs>
+            </a:gsLst>
+            <a:lin ang="0" scaled="0"/>
+          </a:gradFill>
+          <a:ln>
+            <a:noFill/>
+          </a:ln>
         </p:spPr>
-        <p:txBody>
-          <a:bodyPr wrap="square" rtlCol="0">
-            <a:spAutoFit/>
-          </a:bodyPr>
-          <a:lstStyle/>
-          <a:p>
-            <a:pPr algn="ctr"/>
-            <a:r>
-              <a:rPr lang="zh-CN" altLang="en-US" sz="1740" b="1" dirty="0">
-                <a:solidFill>
-                  <a:srgbClr val="2E54A1"/>
-                </a:solidFill>
-                <a:latin typeface="微软雅黑" panose="020B0503020204020204" pitchFamily="34" charset="-122"/>
-                <a:ea typeface="微软雅黑" panose="020B0503020204020204" pitchFamily="34" charset="-122"/>
-              </a:rPr>
-              <a:t>数据</a:t>
-            </a:r>
-          </a:p>
-        </p:txBody>
-      </p:sp>
-      <p:sp>
-        <p:nvSpPr>
-          <p:cNvPr id="28" name="文本框 27">
-            <a:extLst>
-              <a:ext uri="{FF2B5EF4-FFF2-40B4-BE49-F238E27FC236}">
-                <a16:creationId xmlns:a16="http://schemas.microsoft.com/office/drawing/2014/main" id="{16C0167C-A3AD-86FF-C06A-8E812839C915}"/>
-              </a:ext>
-            </a:extLst>
-          </p:cNvPr>
-          <p:cNvSpPr txBox="1"/>
-          <p:nvPr/>
-        </p:nvSpPr>
-        <p:spPr>
-          <a:xfrm>
-            <a:off x="4370104" y="6102148"/>
-            <a:ext cx="1341806" cy="360099"/>
-          </a:xfrm>
-          <a:prstGeom prst="rect">
-            <a:avLst/>
-          </a:prstGeom>
-          <a:noFill/>
-        </p:spPr>
-        <p:txBody>
-          <a:bodyPr wrap="square" rtlCol="0">
-            <a:spAutoFit/>
-          </a:bodyPr>
-          <a:lstStyle/>
-          <a:p>
-            <a:pPr algn="ctr"/>
-            <a:r>
-              <a:rPr lang="zh-CN" altLang="en-US" sz="1740" b="1" dirty="0">
-                <a:solidFill>
-                  <a:srgbClr val="2E54A1"/>
-                </a:solidFill>
-                <a:latin typeface="微软雅黑" panose="020B0503020204020204" pitchFamily="34" charset="-122"/>
-                <a:ea typeface="微软雅黑" panose="020B0503020204020204" pitchFamily="34" charset="-122"/>
-              </a:rPr>
-              <a:t>目标</a:t>
-            </a:r>
+        <p:style>
+          <a:lnRef idx="2">
+            <a:schemeClr val="accent1">
+              <a:shade val="15000"/>
+            </a:schemeClr>
+          </a:lnRef>
+          <a:fillRef idx="1">
+            <a:schemeClr val="accent1"/>
+          </a:fillRef>
+          <a:effectRef idx="0">
+            <a:schemeClr val="accent1"/>
+          </a:effectRef>
+          <a:fontRef idx="minor">
+            <a:schemeClr val="lt1"/>
+          </a:fontRef>
+        </p:style>
+        <p:txBody>
+          <a:bodyPr rtlCol="0" anchor="ctr"/>
+          <a:lstStyle/>
+          <a:p>
+            <a:pPr marL="0" marR="0" lvl="0" indent="0" algn="ctr" defTabSz="914400" rtl="0" eaLnBrk="1" fontAlgn="auto" latinLnBrk="0" hangingPunct="1">
+              <a:lnSpc>
+                <a:spcPct val="100000"/>
+              </a:lnSpc>
+              <a:spcBef>
+                <a:spcPts val="0"/>
+              </a:spcBef>
+              <a:spcAft>
+                <a:spcPts val="0"/>
+              </a:spcAft>
+              <a:buClrTx/>
+              <a:buSzTx/>
+              <a:buFontTx/>
+              <a:buNone/>
+              <a:defRPr/>
+            </a:pPr>
+            <a:endParaRPr kumimoji="0" lang="zh-CN" altLang="en-US" sz="2235" b="0" i="0" u="none" strike="noStrike" kern="1200" cap="none" spc="0" normalizeH="0" baseline="0" noProof="0">
+              <a:ln>
+                <a:noFill/>
+              </a:ln>
+              <a:solidFill>
+                <a:prstClr val="white"/>
+              </a:solidFill>
+              <a:effectLst/>
+              <a:uLnTx/>
+              <a:uFillTx/>
+              <a:latin typeface="等线" panose="02010600030101010101" charset="-122"/>
+              <a:ea typeface="等线" panose="02010600030101010101" charset="-122"/>
+              <a:cs typeface="+mn-cs"/>
+            </a:endParaRPr>
           </a:p>
         </p:txBody>
       </p:sp>
